--- a/Progression_P6/P6-L03_Paper_2_Reading.pptx
+++ b/Progression_P6/P6-L03_Paper_2_Reading.pptx
@@ -52822,7 +52822,7 @@
                 <a:ea typeface="Calibri" pitchFamily="34" charset="-122"/>
                 <a:cs typeface="Calibri" pitchFamily="34" charset="-120"/>
               </a:rPr>
-              <a:t>8 exam words from the website in 1 groups. </a:t>
+              <a:t>8 exam words from the website in one group. </a:t>
             </a:r>
             <a:endParaRPr lang="en-US" sz="1600" dirty="0"/>
           </a:p>

--- a/Progression_P6/P6-L03_Paper_2_Reading.pptx
+++ b/Progression_P6/P6-L03_Paper_2_Reading.pptx
@@ -892,7 +892,11 @@
           <a:lstStyle/>
           <a:p>
             <a:r>
-              <a:rPr lang="en-US" dirty="0"/>
+              <a:rPr lang="ar-SA" dirty="0">
+                <a:latin typeface="Amiri" pitchFamily="2" charset="-78"/>
+                <a:ea typeface="Amiri" pitchFamily="2" charset="-78"/>
+                <a:cs typeface="Amiri" pitchFamily="2" charset="-78"/>
+              </a:rPr>
               <a:t>TEXT 1 (website Q Groups 1–2, 4 marks) — R2 facts. Everyone answers all four. Note the passives (تُغْلَقُ · يُمْنَعُ · تُقَامُ) — typical of notices.</a:t>
             </a:r>
             <a:endParaRPr lang="en-US" dirty="0"/>
@@ -1422,7 +1426,11 @@
           <a:lstStyle/>
           <a:p>
             <a:r>
-              <a:rPr lang="en-US" dirty="0"/>
+              <a:rPr lang="ar-SA" dirty="0">
+                <a:latin typeface="Amiri" pitchFamily="2" charset="-78"/>
+                <a:ea typeface="Amiri" pitchFamily="2" charset="-78"/>
+                <a:cs typeface="Amiri" pitchFamily="2" charset="-78"/>
+              </a:rPr>
               <a:t>TEXT 3 (website Q Groups 5–6, 6 marks): three R3 questions and three Q5 cross-text matches (all three texts). Core: questions 4–6. Develop / Stretch: all 6. For R3, insist on the WHY: لَا يُمْكِنُ إِنْكَارُ أَنَّ concedes before the stronger claim.</a:t>
             </a:r>
             <a:endParaRPr lang="en-US" dirty="0"/>
@@ -1510,7 +1518,11 @@
           <a:lstStyle/>
           <a:p>
             <a:r>
-              <a:rPr lang="en-US" dirty="0"/>
+              <a:rPr lang="ar-SA" dirty="0">
+                <a:latin typeface="Amiri" pitchFamily="2" charset="-78"/>
+                <a:ea typeface="Amiri" pitchFamily="2" charset="-78"/>
+                <a:cs typeface="Amiri" pitchFamily="2" charset="-78"/>
+              </a:rPr>
               <a:t>WELCOME (1 min) — while students join.
 • Greet each student by name as they arrive: السَّلَامُ عَلَيْكُمْ. Take the register (Pastoral Tracker: attendance 0/1).
 • 2-MINUTE CHECK-IN (SEND training): a private chat to any student who seemed unsettled last lesson — “Are you okay today? 👍 / 👎”.
@@ -1691,7 +1703,11 @@
           <a:lstStyle/>
           <a:p>
             <a:r>
-              <a:rPr lang="en-US" dirty="0"/>
+              <a:rPr lang="ar-SA" dirty="0">
+                <a:latin typeface="Amiri" pitchFamily="2" charset="-78"/>
+                <a:ea typeface="Amiri" pitchFamily="2" charset="-78"/>
+                <a:cs typeface="Amiri" pitchFamily="2" charset="-78"/>
+              </a:rPr>
               <a:t>YOU DO (7 min). Live feedback: Stretch students post their first sentence after 3 minutes. Check anna + noun after يَدُلُّ عَلَى.</a:t>
             </a:r>
             <a:endParaRPr lang="en-US" dirty="0"/>
@@ -2762,7 +2778,11 @@
           <a:lstStyle/>
           <a:p>
             <a:r>
-              <a:rPr lang="en-US" dirty="0"/>
+              <a:rPr lang="ar-SA" dirty="0">
+                <a:latin typeface="Amiri" pitchFamily="2" charset="-78"/>
+                <a:ea typeface="Amiri" pitchFamily="2" charset="-78"/>
+                <a:cs typeface="Amiri" pitchFamily="2" charset="-78"/>
+              </a:rPr>
               <a:t>KEY WORDS — HOW TO TEACH EACH GROUP (EAL pre-teaching routine, 7 min)
 1. HEAR IT: say the word twice, clearly, with a gesture where possible.
 2. SAY IT: choral repetition — “I say, you say” — then two volunteers.
@@ -2857,7 +2877,11 @@
           <a:lstStyle/>
           <a:p>
             <a:r>
-              <a:rPr lang="en-US" dirty="0"/>
+              <a:rPr lang="ar-SA" dirty="0">
+                <a:latin typeface="Amiri" pitchFamily="2" charset="-78"/>
+                <a:ea typeface="Amiri" pitchFamily="2" charset="-78"/>
+                <a:cs typeface="Amiri" pitchFamily="2" charset="-78"/>
+              </a:rPr>
               <a:t>KEY WORDS — The R1–R4 hierarchy (website vocabulary (1 of 2)). Hear → Say → See → Use. Transliteration is printed for Core students (cover it for Develop/Stretch).
 The R1–R4 ladder in Arabic: المَعْنَى العَامُّ (R1) → التَّفَاصِيلُ الوَاقِعِيَّةُ (R2) → الرَّأْيُ وَالمَوْقِفُ وَالأُسْلُوبُ (R3) → الاِخْتِيَارُ وَتَحْدِيدُ المَعْلُومَاتِ (R4). Every answer needs الأَدِلَّةُ النَّصِّيَّةُ — the words in the text that prove it.</a:t>
             </a:r>
@@ -2946,7 +2970,11 @@
           <a:lstStyle/>
           <a:p>
             <a:r>
-              <a:rPr lang="en-US" dirty="0"/>
+              <a:rPr lang="ar-SA" dirty="0">
+                <a:latin typeface="Amiri" pitchFamily="2" charset="-78"/>
+                <a:ea typeface="Amiri" pitchFamily="2" charset="-78"/>
+                <a:cs typeface="Amiri" pitchFamily="2" charset="-78"/>
+              </a:rPr>
               <a:t>KEY WORDS — The R1–R4 hierarchy (website vocabulary (2 of 2)). Hear → Say → See → Use. Transliteration is printed for Core students (cover it for Develop/Stretch).
 The R1–R4 ladder in Arabic: المَعْنَى العَامُّ (R1) → التَّفَاصِيلُ الوَاقِعِيَّةُ (R2) → الرَّأْيُ وَالمَوْقِفُ وَالأُسْلُوبُ (R3) → الاِخْتِيَارُ وَتَحْدِيدُ المَعْلُومَاتِ (R4). Every answer needs الأَدِلَّةُ النَّصِّيَّةُ — the words in the text that prove it.</a:t>
             </a:r>
@@ -3431,6 +3459,7 @@
                   <a:srgbClr val="D4AF37"/>
                 </a:solidFill>
                 <a:latin typeface="Amiri" pitchFamily="2" charset="-78"/>
+                <a:ea typeface="Amiri" pitchFamily="2" charset="-78"/>
                 <a:cs typeface="Amiri" pitchFamily="2" charset="-78"/>
               </a:rPr>
               <a:t>م</a:t>
@@ -3637,6 +3666,7 @@
                   <a:srgbClr val="D4AF37"/>
                 </a:solidFill>
                 <a:latin typeface="Amiri" pitchFamily="2" charset="-78"/>
+                <a:ea typeface="Amiri" pitchFamily="2" charset="-78"/>
                 <a:cs typeface="Amiri" pitchFamily="2" charset="-78"/>
               </a:rPr>
               <a:t>الوَرَقَةُ الثَّانِيَةُ — القِرَاءَةُ: تَدْرِيبٌ كَامِلٌ وَإِتْقَانُ المُسْتَوَيَاتِ</a:t>
@@ -4094,6 +4124,7 @@
                   <a:srgbClr val="D4AF37"/>
                 </a:solidFill>
                 <a:latin typeface="Amiri" pitchFamily="2" charset="-78"/>
+                <a:ea typeface="Amiri" pitchFamily="2" charset="-78"/>
                 <a:cs typeface="Amiri" pitchFamily="2" charset="-78"/>
               </a:rPr>
               <a:t>م</a:t>
@@ -4414,6 +4445,7 @@
                   <a:srgbClr val="8A6D1E"/>
                 </a:solidFill>
                 <a:latin typeface="Amiri" pitchFamily="2" charset="-78"/>
+                <a:ea typeface="Amiri" pitchFamily="2" charset="-78"/>
                 <a:cs typeface="Amiri" pitchFamily="2" charset="-78"/>
               </a:rPr>
               <a:t>سُلَّمُ القِرَاءَةِ</a:t>
@@ -5038,6 +5070,7 @@
                   <a:srgbClr val="1B3B6F"/>
                 </a:solidFill>
                 <a:latin typeface="Amiri" pitchFamily="2" charset="-78"/>
+                <a:ea typeface="Amiri" pitchFamily="2" charset="-78"/>
                 <a:cs typeface="Amiri" pitchFamily="2" charset="-78"/>
               </a:rPr>
               <a:t>يُشَارُ إِلَى أَنَّ …</a:t>
@@ -5137,6 +5170,7 @@
                   <a:srgbClr val="1B3B6F"/>
                 </a:solidFill>
                 <a:latin typeface="Amiri" pitchFamily="2" charset="-78"/>
+                <a:ea typeface="Amiri" pitchFamily="2" charset="-78"/>
                 <a:cs typeface="Amiri" pitchFamily="2" charset="-78"/>
               </a:rPr>
               <a:t>تُغْلَقُ المَكْتَبَةُ فِي السَّاعَةِ الثَّامِنَةِ</a:t>
@@ -5236,6 +5270,7 @@
                   <a:srgbClr val="1B3B6F"/>
                 </a:solidFill>
                 <a:latin typeface="Amiri" pitchFamily="2" charset="-78"/>
+                <a:ea typeface="Amiri" pitchFamily="2" charset="-78"/>
                 <a:cs typeface="Amiri" pitchFamily="2" charset="-78"/>
               </a:rPr>
               <a:t>صَحِيحٌ أَنَّ … غَيْرَ أَنَّ …</a:t>
@@ -5335,6 +5370,7 @@
                   <a:srgbClr val="1B3B6F"/>
                 </a:solidFill>
                 <a:latin typeface="Amiri" pitchFamily="2" charset="-78"/>
+                <a:ea typeface="Amiri" pitchFamily="2" charset="-78"/>
                 <a:cs typeface="Amiri" pitchFamily="2" charset="-78"/>
               </a:rPr>
               <a:t>أَنْ تُنَظِّمَ · لَتَغَيَّرَتْ</a:t>
@@ -5506,6 +5542,7 @@
                   <a:srgbClr val="D4AF37"/>
                 </a:solidFill>
                 <a:latin typeface="Amiri" pitchFamily="2" charset="-78"/>
+                <a:ea typeface="Amiri" pitchFamily="2" charset="-78"/>
                 <a:cs typeface="Amiri" pitchFamily="2" charset="-78"/>
               </a:rPr>
               <a:t>م</a:t>
@@ -5826,6 +5863,7 @@
                   <a:srgbClr val="8A6D1E"/>
                 </a:solidFill>
                 <a:latin typeface="Amiri" pitchFamily="2" charset="-78"/>
+                <a:ea typeface="Amiri" pitchFamily="2" charset="-78"/>
                 <a:cs typeface="Amiri" pitchFamily="2" charset="-78"/>
               </a:rPr>
               <a:t>السُّؤَالُ الرَّابِعُ وَالخَامِسُ</a:t>
@@ -6450,6 +6488,7 @@
                   <a:srgbClr val="1B3B6F"/>
                 </a:solidFill>
                 <a:latin typeface="Amiri" pitchFamily="2" charset="-78"/>
+                <a:ea typeface="Amiri" pitchFamily="2" charset="-78"/>
                 <a:cs typeface="Amiri" pitchFamily="2" charset="-78"/>
               </a:rPr>
               <a:t>صَحِيحٌ أَنَّ الوَقْتَ مَحْدُودٌ</a:t>
@@ -6549,6 +6588,7 @@
                   <a:srgbClr val="1B3B6F"/>
                 </a:solidFill>
                 <a:latin typeface="Amiri" pitchFamily="2" charset="-78"/>
+                <a:ea typeface="Amiri" pitchFamily="2" charset="-78"/>
                 <a:cs typeface="Amiri" pitchFamily="2" charset="-78"/>
               </a:rPr>
               <a:t>يَتَطَلَّبُ الأَمْرُ أَنْ تُنَظِّمَ</a:t>
@@ -6648,6 +6688,7 @@
                   <a:srgbClr val="1B3B6F"/>
                 </a:solidFill>
                 <a:latin typeface="Amiri" pitchFamily="2" charset="-78"/>
+                <a:ea typeface="Amiri" pitchFamily="2" charset="-78"/>
                 <a:cs typeface="Amiri" pitchFamily="2" charset="-78"/>
               </a:rPr>
               <a:t>لَوْ شَارَكَ …، لَتَغَيَّرَتْ</a:t>
@@ -6929,6 +6970,7 @@
                   <a:srgbClr val="D4AF37"/>
                 </a:solidFill>
                 <a:latin typeface="Amiri" pitchFamily="2" charset="-78"/>
+                <a:ea typeface="Amiri" pitchFamily="2" charset="-78"/>
                 <a:cs typeface="Amiri" pitchFamily="2" charset="-78"/>
               </a:rPr>
               <a:t>م</a:t>
@@ -7249,6 +7291,7 @@
                   <a:srgbClr val="8A6D1E"/>
                 </a:solidFill>
                 <a:latin typeface="Amiri" pitchFamily="2" charset="-78"/>
+                <a:ea typeface="Amiri" pitchFamily="2" charset="-78"/>
                 <a:cs typeface="Amiri" pitchFamily="2" charset="-78"/>
               </a:rPr>
               <a:t>النَّصُّ</a:t>
@@ -7362,6 +7405,7 @@
                   <a:srgbClr val="1F2A37"/>
                 </a:solidFill>
                 <a:latin typeface="Amiri" pitchFamily="2" charset="-78"/>
+                <a:ea typeface="Amiri" pitchFamily="2" charset="-78"/>
                 <a:cs typeface="Amiri" pitchFamily="2" charset="-78"/>
               </a:rPr>
               <a:t>إِعْلَانٌ: تُغْلَقُ المَكْتَبَةُ فِي السَّاعَةِ الثَّامِنَةِ مَسَاءً. يُمْنَعُ إِدْخَالُ الطَّعَامِ. لِاسْتِعَارَةِ الكُتُبِ، يَجِبُ إِبْرَازُ البِطَاقَةِ. وَتُقَامُ حَلْقَةُ قِرَاءَةٍ كُلَّ خَمِيسٍ فِي السَّاعَةِ الرَّابِعَةِ.</a:t>
@@ -7472,6 +7516,7 @@
                   <a:srgbClr val="1B3B6F"/>
                 </a:solidFill>
                 <a:latin typeface="Amiri" pitchFamily="2" charset="-78"/>
+                <a:ea typeface="Amiri" pitchFamily="2" charset="-78"/>
                 <a:cs typeface="Amiri" pitchFamily="2" charset="-78"/>
               </a:rPr>
               <a:t>إِعْلَانٌ</a:t>
@@ -7548,6 +7593,7 @@
                   <a:srgbClr val="1B3B6F"/>
                 </a:solidFill>
                 <a:latin typeface="Amiri" pitchFamily="2" charset="-78"/>
+                <a:ea typeface="Amiri" pitchFamily="2" charset="-78"/>
                 <a:cs typeface="Amiri" pitchFamily="2" charset="-78"/>
               </a:rPr>
               <a:t>تُغْلَقُ</a:t>
@@ -7624,6 +7670,7 @@
                   <a:srgbClr val="1B3B6F"/>
                 </a:solidFill>
                 <a:latin typeface="Amiri" pitchFamily="2" charset="-78"/>
+                <a:ea typeface="Amiri" pitchFamily="2" charset="-78"/>
                 <a:cs typeface="Amiri" pitchFamily="2" charset="-78"/>
               </a:rPr>
               <a:t>يُمْنَعُ</a:t>
@@ -7700,6 +7747,7 @@
                   <a:srgbClr val="1B3B6F"/>
                 </a:solidFill>
                 <a:latin typeface="Amiri" pitchFamily="2" charset="-78"/>
+                <a:ea typeface="Amiri" pitchFamily="2" charset="-78"/>
                 <a:cs typeface="Amiri" pitchFamily="2" charset="-78"/>
               </a:rPr>
               <a:t>إِدْخَالُ الطَّعَامِ</a:t>
@@ -7776,6 +7824,7 @@
                   <a:srgbClr val="1B3B6F"/>
                 </a:solidFill>
                 <a:latin typeface="Amiri" pitchFamily="2" charset="-78"/>
+                <a:ea typeface="Amiri" pitchFamily="2" charset="-78"/>
                 <a:cs typeface="Amiri" pitchFamily="2" charset="-78"/>
               </a:rPr>
               <a:t>اسْتِعَارَةِ الكُتُبِ</a:t>
@@ -7852,6 +7901,7 @@
                   <a:srgbClr val="1B3B6F"/>
                 </a:solidFill>
                 <a:latin typeface="Amiri" pitchFamily="2" charset="-78"/>
+                <a:ea typeface="Amiri" pitchFamily="2" charset="-78"/>
                 <a:cs typeface="Amiri" pitchFamily="2" charset="-78"/>
               </a:rPr>
               <a:t>إِبْرَازُ البِطَاقَةِ</a:t>
@@ -7928,6 +7978,7 @@
                   <a:srgbClr val="1B3B6F"/>
                 </a:solidFill>
                 <a:latin typeface="Amiri" pitchFamily="2" charset="-78"/>
+                <a:ea typeface="Amiri" pitchFamily="2" charset="-78"/>
                 <a:cs typeface="Amiri" pitchFamily="2" charset="-78"/>
               </a:rPr>
               <a:t>تُقَامُ</a:t>
@@ -8004,6 +8055,7 @@
                   <a:srgbClr val="1B3B6F"/>
                 </a:solidFill>
                 <a:latin typeface="Amiri" pitchFamily="2" charset="-78"/>
+                <a:ea typeface="Amiri" pitchFamily="2" charset="-78"/>
                 <a:cs typeface="Amiri" pitchFamily="2" charset="-78"/>
               </a:rPr>
               <a:t>حَلْقَةُ قِرَاءَةٍ</a:t>
@@ -8175,6 +8227,7 @@
                   <a:srgbClr val="D4AF37"/>
                 </a:solidFill>
                 <a:latin typeface="Amiri" pitchFamily="2" charset="-78"/>
+                <a:ea typeface="Amiri" pitchFamily="2" charset="-78"/>
                 <a:cs typeface="Amiri" pitchFamily="2" charset="-78"/>
               </a:rPr>
               <a:t>م</a:t>
@@ -8495,6 +8548,7 @@
                   <a:srgbClr val="8A6D1E"/>
                 </a:solidFill>
                 <a:latin typeface="Amiri" pitchFamily="2" charset="-78"/>
+                <a:ea typeface="Amiri" pitchFamily="2" charset="-78"/>
                 <a:cs typeface="Amiri" pitchFamily="2" charset="-78"/>
               </a:rPr>
               <a:t>أَسْئِلَةُ القِرَاءَةِ</a:t>
@@ -10418,6 +10472,7 @@
                   <a:srgbClr val="D4AF37"/>
                 </a:solidFill>
                 <a:latin typeface="Amiri" pitchFamily="2" charset="-78"/>
+                <a:ea typeface="Amiri" pitchFamily="2" charset="-78"/>
                 <a:cs typeface="Amiri" pitchFamily="2" charset="-78"/>
               </a:rPr>
               <a:t>م</a:t>
@@ -10738,6 +10793,7 @@
                   <a:srgbClr val="8A6D1E"/>
                 </a:solidFill>
                 <a:latin typeface="Amiri" pitchFamily="2" charset="-78"/>
+                <a:ea typeface="Amiri" pitchFamily="2" charset="-78"/>
                 <a:cs typeface="Amiri" pitchFamily="2" charset="-78"/>
               </a:rPr>
               <a:t>الإِجَابَاتُ</a:t>
@@ -11279,6 +11335,7 @@
                   <a:srgbClr val="8A6D1E"/>
                 </a:solidFill>
                 <a:latin typeface="Amiri" pitchFamily="2" charset="-78"/>
+                <a:ea typeface="Amiri" pitchFamily="2" charset="-78"/>
                 <a:cs typeface="Amiri" pitchFamily="2" charset="-78"/>
               </a:rPr>
               <a:t>تُغْلَقُ المَكْتَبَةُ فِي السَّاعَةِ الثَّامِنَةِ مَسَاءً.</a:t>
@@ -11782,6 +11839,7 @@
                   <a:srgbClr val="8A6D1E"/>
                 </a:solidFill>
                 <a:latin typeface="Amiri" pitchFamily="2" charset="-78"/>
+                <a:ea typeface="Amiri" pitchFamily="2" charset="-78"/>
                 <a:cs typeface="Amiri" pitchFamily="2" charset="-78"/>
               </a:rPr>
               <a:t>يُمْنَعُ إِدْخَالُ الطَّعَامِ.</a:t>
@@ -12285,6 +12343,7 @@
                   <a:srgbClr val="8A6D1E"/>
                 </a:solidFill>
                 <a:latin typeface="Amiri" pitchFamily="2" charset="-78"/>
+                <a:ea typeface="Amiri" pitchFamily="2" charset="-78"/>
                 <a:cs typeface="Amiri" pitchFamily="2" charset="-78"/>
               </a:rPr>
               <a:t>لِاسْتِعَارَةِ الكُتُبِ، يَجِبُ إِبْرَازُ البِطَاقَةِ.</a:t>
@@ -12788,6 +12847,7 @@
                   <a:srgbClr val="8A6D1E"/>
                 </a:solidFill>
                 <a:latin typeface="Amiri" pitchFamily="2" charset="-78"/>
+                <a:ea typeface="Amiri" pitchFamily="2" charset="-78"/>
                 <a:cs typeface="Amiri" pitchFamily="2" charset="-78"/>
               </a:rPr>
               <a:t>تُقَامُ حَلْقَةُ قِرَاءَةٍ كُلَّ خَمِيسٍ فِي السَّاعَةِ الرَّابِعَةِ.</a:t>
@@ -12921,6 +12981,7 @@
                   <a:srgbClr val="D4AF37"/>
                 </a:solidFill>
                 <a:latin typeface="Amiri" pitchFamily="2" charset="-78"/>
+                <a:ea typeface="Amiri" pitchFamily="2" charset="-78"/>
                 <a:cs typeface="Amiri" pitchFamily="2" charset="-78"/>
               </a:rPr>
               <a:t>م</a:t>
@@ -13241,6 +13302,7 @@
                   <a:srgbClr val="8A6D1E"/>
                 </a:solidFill>
                 <a:latin typeface="Amiri" pitchFamily="2" charset="-78"/>
+                <a:ea typeface="Amiri" pitchFamily="2" charset="-78"/>
                 <a:cs typeface="Amiri" pitchFamily="2" charset="-78"/>
               </a:rPr>
               <a:t>النَّصُّ</a:t>
@@ -13354,6 +13416,7 @@
                   <a:srgbClr val="1F2A37"/>
                 </a:solidFill>
                 <a:latin typeface="Amiri" pitchFamily="2" charset="-78"/>
+                <a:ea typeface="Amiri" pitchFamily="2" charset="-78"/>
                 <a:cs typeface="Amiri" pitchFamily="2" charset="-78"/>
               </a:rPr>
               <a:t>يُشَارُ إِلَى أَنَّ العَمَلَ التَّطَوُّعِيَّ يُقَوِّي رَوَابِطَ المُجْتَمَعِ. صَحِيحٌ أَنَّ الوَقْتَ مَحْدُودٌ لَدَى الطُّلَّابِ، غَيْرَ أَنَّ سَاعَةً وَاحِدَةً أُسْبُوعِيًّا تَصْنَعُ فَرْقًا. وَيَتَطَلَّبُ الأَمْرُ أَنْ تُنَظِّمَ المَدَارِسُ بَرَامِجَ تَطَوُّعٍ. وَلَوْ شَارَكَ كُلُّ طَالِبٍ، لَتَغَيَّرَتِ الأَحْيَاءُ.</a:t>
@@ -13464,6 +13527,7 @@
                   <a:srgbClr val="1B3B6F"/>
                 </a:solidFill>
                 <a:latin typeface="Amiri" pitchFamily="2" charset="-78"/>
+                <a:ea typeface="Amiri" pitchFamily="2" charset="-78"/>
                 <a:cs typeface="Amiri" pitchFamily="2" charset="-78"/>
               </a:rPr>
               <a:t>العَمَلَ التَّطَوُّعِيَّ</a:t>
@@ -13540,6 +13604,7 @@
                   <a:srgbClr val="1B3B6F"/>
                 </a:solidFill>
                 <a:latin typeface="Amiri" pitchFamily="2" charset="-78"/>
+                <a:ea typeface="Amiri" pitchFamily="2" charset="-78"/>
                 <a:cs typeface="Amiri" pitchFamily="2" charset="-78"/>
               </a:rPr>
               <a:t>يُقَوِّي</a:t>
@@ -13616,6 +13681,7 @@
                   <a:srgbClr val="1B3B6F"/>
                 </a:solidFill>
                 <a:latin typeface="Amiri" pitchFamily="2" charset="-78"/>
+                <a:ea typeface="Amiri" pitchFamily="2" charset="-78"/>
                 <a:cs typeface="Amiri" pitchFamily="2" charset="-78"/>
               </a:rPr>
               <a:t>رَوَابِطَ المُجْتَمَعِ</a:t>
@@ -13692,6 +13758,7 @@
                   <a:srgbClr val="1B3B6F"/>
                 </a:solidFill>
                 <a:latin typeface="Amiri" pitchFamily="2" charset="-78"/>
+                <a:ea typeface="Amiri" pitchFamily="2" charset="-78"/>
                 <a:cs typeface="Amiri" pitchFamily="2" charset="-78"/>
               </a:rPr>
               <a:t>مَحْدُودٌ</a:t>
@@ -13768,6 +13835,7 @@
                   <a:srgbClr val="1B3B6F"/>
                 </a:solidFill>
                 <a:latin typeface="Amiri" pitchFamily="2" charset="-78"/>
+                <a:ea typeface="Amiri" pitchFamily="2" charset="-78"/>
                 <a:cs typeface="Amiri" pitchFamily="2" charset="-78"/>
               </a:rPr>
               <a:t>أُسْبُوعِيًّا</a:t>
@@ -13844,6 +13912,7 @@
                   <a:srgbClr val="1B3B6F"/>
                 </a:solidFill>
                 <a:latin typeface="Amiri" pitchFamily="2" charset="-78"/>
+                <a:ea typeface="Amiri" pitchFamily="2" charset="-78"/>
                 <a:cs typeface="Amiri" pitchFamily="2" charset="-78"/>
               </a:rPr>
               <a:t>تَصْنَعُ فَرْقًا</a:t>
@@ -13920,6 +13989,7 @@
                   <a:srgbClr val="1B3B6F"/>
                 </a:solidFill>
                 <a:latin typeface="Amiri" pitchFamily="2" charset="-78"/>
+                <a:ea typeface="Amiri" pitchFamily="2" charset="-78"/>
                 <a:cs typeface="Amiri" pitchFamily="2" charset="-78"/>
               </a:rPr>
               <a:t>بَرَامِجَ تَطَوُّعٍ</a:t>
@@ -13996,6 +14066,7 @@
                   <a:srgbClr val="1B3B6F"/>
                 </a:solidFill>
                 <a:latin typeface="Amiri" pitchFamily="2" charset="-78"/>
+                <a:ea typeface="Amiri" pitchFamily="2" charset="-78"/>
                 <a:cs typeface="Amiri" pitchFamily="2" charset="-78"/>
               </a:rPr>
               <a:t>الأَحْيَاءُ</a:t>
@@ -14167,6 +14238,7 @@
                   <a:srgbClr val="D4AF37"/>
                 </a:solidFill>
                 <a:latin typeface="Amiri" pitchFamily="2" charset="-78"/>
+                <a:ea typeface="Amiri" pitchFamily="2" charset="-78"/>
                 <a:cs typeface="Amiri" pitchFamily="2" charset="-78"/>
               </a:rPr>
               <a:t>م</a:t>
@@ -14487,6 +14559,7 @@
                   <a:srgbClr val="8A6D1E"/>
                 </a:solidFill>
                 <a:latin typeface="Amiri" pitchFamily="2" charset="-78"/>
+                <a:ea typeface="Amiri" pitchFamily="2" charset="-78"/>
                 <a:cs typeface="Amiri" pitchFamily="2" charset="-78"/>
               </a:rPr>
               <a:t>أَسْئِلَةُ القِرَاءَةِ</a:t>
@@ -15549,6 +15622,7 @@
                   <a:srgbClr val="1B3B6F"/>
                 </a:solidFill>
                 <a:latin typeface="Amiri" pitchFamily="2" charset="-78"/>
+                <a:ea typeface="Amiri" pitchFamily="2" charset="-78"/>
                 <a:cs typeface="Amiri" pitchFamily="2" charset="-78"/>
               </a:rPr>
               <a:t>صَحِيحٌ أَنَّ الوَقْتَ مَحْدُودٌ</a:t>
@@ -16013,6 +16087,7 @@
                   <a:srgbClr val="1B3B6F"/>
                 </a:solidFill>
                 <a:latin typeface="Amiri" pitchFamily="2" charset="-78"/>
+                <a:ea typeface="Amiri" pitchFamily="2" charset="-78"/>
                 <a:cs typeface="Amiri" pitchFamily="2" charset="-78"/>
               </a:rPr>
               <a:t>صَحِيحٌ أَنَّ الوَقْتَ</a:t>
@@ -16039,6 +16114,7 @@
                   <a:srgbClr val="1B3B6F"/>
                 </a:solidFill>
                 <a:latin typeface="Amiri" pitchFamily="2" charset="-78"/>
+                <a:ea typeface="Amiri" pitchFamily="2" charset="-78"/>
                 <a:cs typeface="Amiri" pitchFamily="2" charset="-78"/>
               </a:rPr>
               <a:t>، غَيْرَ أَنَّ</a:t>
@@ -16153,6 +16229,7 @@
                   <a:srgbClr val="1F2A37"/>
                 </a:solidFill>
                 <a:latin typeface="Amiri" pitchFamily="2" charset="-78"/>
+                <a:ea typeface="Amiri" pitchFamily="2" charset="-78"/>
                 <a:cs typeface="Amiri" pitchFamily="2" charset="-78"/>
               </a:rPr>
               <a:t>يَكُونَ مَحْدُودًا</a:t>
@@ -16267,6 +16344,7 @@
                   <a:srgbClr val="1F2A37"/>
                 </a:solidFill>
                 <a:latin typeface="Amiri" pitchFamily="2" charset="-78"/>
+                <a:ea typeface="Amiri" pitchFamily="2" charset="-78"/>
                 <a:cs typeface="Amiri" pitchFamily="2" charset="-78"/>
               </a:rPr>
               <a:t>مَحْدُودٌ</a:t>
@@ -16381,6 +16459,7 @@
                   <a:srgbClr val="1F2A37"/>
                 </a:solidFill>
                 <a:latin typeface="Amiri" pitchFamily="2" charset="-78"/>
+                <a:ea typeface="Amiri" pitchFamily="2" charset="-78"/>
                 <a:cs typeface="Amiri" pitchFamily="2" charset="-78"/>
               </a:rPr>
               <a:t>كَانَ مَحْدُودًا لَـ</a:t>
@@ -16542,6 +16621,7 @@
                   <a:srgbClr val="1B3B6F"/>
                 </a:solidFill>
                 <a:latin typeface="Amiri" pitchFamily="2" charset="-78"/>
+                <a:ea typeface="Amiri" pitchFamily="2" charset="-78"/>
                 <a:cs typeface="Amiri" pitchFamily="2" charset="-78"/>
               </a:rPr>
               <a:t>يَتَطَلَّبُ الأَمْرُ أَنْ</a:t>
@@ -16568,6 +16648,7 @@
                   <a:srgbClr val="1B3B6F"/>
                 </a:solidFill>
                 <a:latin typeface="Amiri" pitchFamily="2" charset="-78"/>
+                <a:ea typeface="Amiri" pitchFamily="2" charset="-78"/>
                 <a:cs typeface="Amiri" pitchFamily="2" charset="-78"/>
               </a:rPr>
               <a:t>المَدَارِسُ بَرَامِجَ</a:t>
@@ -16682,6 +16763,7 @@
                   <a:srgbClr val="1F2A37"/>
                 </a:solidFill>
                 <a:latin typeface="Amiri" pitchFamily="2" charset="-78"/>
+                <a:ea typeface="Amiri" pitchFamily="2" charset="-78"/>
                 <a:cs typeface="Amiri" pitchFamily="2" charset="-78"/>
               </a:rPr>
               <a:t>تُنَظِّمُ</a:t>
@@ -16796,6 +16878,7 @@
                   <a:srgbClr val="1F2A37"/>
                 </a:solidFill>
                 <a:latin typeface="Amiri" pitchFamily="2" charset="-78"/>
+                <a:ea typeface="Amiri" pitchFamily="2" charset="-78"/>
                 <a:cs typeface="Amiri" pitchFamily="2" charset="-78"/>
               </a:rPr>
               <a:t>تُنَظِّمَ</a:t>
@@ -16910,6 +16993,7 @@
                   <a:srgbClr val="1F2A37"/>
                 </a:solidFill>
                 <a:latin typeface="Amiri" pitchFamily="2" charset="-78"/>
+                <a:ea typeface="Amiri" pitchFamily="2" charset="-78"/>
                 <a:cs typeface="Amiri" pitchFamily="2" charset="-78"/>
               </a:rPr>
               <a:t>نَظَّمَتْ</a:t>
@@ -17071,6 +17155,7 @@
                   <a:srgbClr val="1B3B6F"/>
                 </a:solidFill>
                 <a:latin typeface="Amiri" pitchFamily="2" charset="-78"/>
+                <a:ea typeface="Amiri" pitchFamily="2" charset="-78"/>
                 <a:cs typeface="Amiri" pitchFamily="2" charset="-78"/>
               </a:rPr>
               <a:t>لَوْ شَارَكَ كُلُّ طَالِبٍ،</a:t>
@@ -17097,6 +17182,7 @@
                   <a:srgbClr val="1B3B6F"/>
                 </a:solidFill>
                 <a:latin typeface="Amiri" pitchFamily="2" charset="-78"/>
+                <a:ea typeface="Amiri" pitchFamily="2" charset="-78"/>
                 <a:cs typeface="Amiri" pitchFamily="2" charset="-78"/>
               </a:rPr>
               <a:t>الأَحْيَاءُ</a:t>
@@ -17211,6 +17297,7 @@
                   <a:srgbClr val="1F2A37"/>
                 </a:solidFill>
                 <a:latin typeface="Amiri" pitchFamily="2" charset="-78"/>
+                <a:ea typeface="Amiri" pitchFamily="2" charset="-78"/>
                 <a:cs typeface="Amiri" pitchFamily="2" charset="-78"/>
               </a:rPr>
               <a:t>سَتَتَغَيَّرُ</a:t>
@@ -17325,6 +17412,7 @@
                   <a:srgbClr val="1F2A37"/>
                 </a:solidFill>
                 <a:latin typeface="Amiri" pitchFamily="2" charset="-78"/>
+                <a:ea typeface="Amiri" pitchFamily="2" charset="-78"/>
                 <a:cs typeface="Amiri" pitchFamily="2" charset="-78"/>
               </a:rPr>
               <a:t>تَتَغَيَّرُ</a:t>
@@ -17439,6 +17527,7 @@
                   <a:srgbClr val="1F2A37"/>
                 </a:solidFill>
                 <a:latin typeface="Amiri" pitchFamily="2" charset="-78"/>
+                <a:ea typeface="Amiri" pitchFamily="2" charset="-78"/>
                 <a:cs typeface="Amiri" pitchFamily="2" charset="-78"/>
               </a:rPr>
               <a:t>لَتَغَيَّرَتِ</a:t>
@@ -17585,6 +17674,7 @@
                   <a:srgbClr val="D4AF37"/>
                 </a:solidFill>
                 <a:latin typeface="Amiri" pitchFamily="2" charset="-78"/>
+                <a:ea typeface="Amiri" pitchFamily="2" charset="-78"/>
                 <a:cs typeface="Amiri" pitchFamily="2" charset="-78"/>
               </a:rPr>
               <a:t>م</a:t>
@@ -17905,6 +17995,7 @@
                   <a:srgbClr val="8A6D1E"/>
                 </a:solidFill>
                 <a:latin typeface="Amiri" pitchFamily="2" charset="-78"/>
+                <a:ea typeface="Amiri" pitchFamily="2" charset="-78"/>
                 <a:cs typeface="Amiri" pitchFamily="2" charset="-78"/>
               </a:rPr>
               <a:t>الإِجَابَاتُ</a:t>
@@ -18446,6 +18537,7 @@
                   <a:srgbClr val="8A6D1E"/>
                 </a:solidFill>
                 <a:latin typeface="Amiri" pitchFamily="2" charset="-78"/>
+                <a:ea typeface="Amiri" pitchFamily="2" charset="-78"/>
                 <a:cs typeface="Amiri" pitchFamily="2" charset="-78"/>
               </a:rPr>
               <a:t>يُشَارُ إِلَى أَنَّ العَمَلَ التَّطَوُّعِيَّ يُقَوِّي رَوَابِطَ المُجْتَمَعِ.</a:t>
@@ -18949,6 +19041,7 @@
                   <a:srgbClr val="8A6D1E"/>
                 </a:solidFill>
                 <a:latin typeface="Amiri" pitchFamily="2" charset="-78"/>
+                <a:ea typeface="Amiri" pitchFamily="2" charset="-78"/>
                 <a:cs typeface="Amiri" pitchFamily="2" charset="-78"/>
               </a:rPr>
               <a:t>سَاعَةً وَاحِدَةً أُسْبُوعِيًّا تَصْنَعُ فَرْقًا.</a:t>
@@ -19097,6 +19190,7 @@
                   <a:srgbClr val="1B3B6F"/>
                 </a:solidFill>
                 <a:latin typeface="Amiri" pitchFamily="2" charset="-78"/>
+                <a:ea typeface="Amiri" pitchFamily="2" charset="-78"/>
                 <a:cs typeface="Amiri" pitchFamily="2" charset="-78"/>
               </a:rPr>
               <a:t>صَحِيحٌ أَنَّ الوَقْتَ مَحْدُودٌ</a:t>
@@ -19626,6 +19720,7 @@
                   <a:srgbClr val="1B3B6F"/>
                 </a:solidFill>
                 <a:latin typeface="Amiri" pitchFamily="2" charset="-78"/>
+                <a:ea typeface="Amiri" pitchFamily="2" charset="-78"/>
                 <a:cs typeface="Amiri" pitchFamily="2" charset="-78"/>
               </a:rPr>
               <a:t>صَحِيحٌ أَنَّ الوَقْتَ</a:t>
@@ -19652,6 +19747,7 @@
                   <a:srgbClr val="1B3B6F"/>
                 </a:solidFill>
                 <a:latin typeface="Amiri" pitchFamily="2" charset="-78"/>
+                <a:ea typeface="Amiri" pitchFamily="2" charset="-78"/>
                 <a:cs typeface="Amiri" pitchFamily="2" charset="-78"/>
               </a:rPr>
               <a:t>، غَيْرَ أَنَّ</a:t>
@@ -19766,6 +19862,7 @@
                   <a:srgbClr val="9AA1AB"/>
                 </a:solidFill>
                 <a:latin typeface="Amiri" pitchFamily="2" charset="-78"/>
+                <a:ea typeface="Amiri" pitchFamily="2" charset="-78"/>
                 <a:cs typeface="Amiri" pitchFamily="2" charset="-78"/>
               </a:rPr>
               <a:t>يَكُونَ مَحْدُودًا</a:t>
@@ -19907,6 +20004,7 @@
                   <a:srgbClr val="1F2A37"/>
                 </a:solidFill>
                 <a:latin typeface="Amiri" pitchFamily="2" charset="-78"/>
+                <a:ea typeface="Amiri" pitchFamily="2" charset="-78"/>
                 <a:cs typeface="Amiri" pitchFamily="2" charset="-78"/>
               </a:rPr>
               <a:t>مَحْدُودٌ</a:t>
@@ -20021,6 +20119,7 @@
                   <a:srgbClr val="9AA1AB"/>
                 </a:solidFill>
                 <a:latin typeface="Amiri" pitchFamily="2" charset="-78"/>
+                <a:ea typeface="Amiri" pitchFamily="2" charset="-78"/>
                 <a:cs typeface="Amiri" pitchFamily="2" charset="-78"/>
               </a:rPr>
               <a:t>كَانَ مَحْدُودًا لَـ</a:t>
@@ -20085,6 +20184,7 @@
                   <a:srgbClr val="8A6D1E"/>
                 </a:solidFill>
                 <a:latin typeface="Amiri" pitchFamily="2" charset="-78"/>
+                <a:ea typeface="Amiri" pitchFamily="2" charset="-78"/>
                 <a:cs typeface="Amiri" pitchFamily="2" charset="-78"/>
               </a:rPr>
               <a:t>صَحِيحٌ أَنَّ</a:t>
@@ -20246,6 +20346,7 @@
                   <a:srgbClr val="1B3B6F"/>
                 </a:solidFill>
                 <a:latin typeface="Amiri" pitchFamily="2" charset="-78"/>
+                <a:ea typeface="Amiri" pitchFamily="2" charset="-78"/>
                 <a:cs typeface="Amiri" pitchFamily="2" charset="-78"/>
               </a:rPr>
               <a:t>يَتَطَلَّبُ الأَمْرُ أَنْ</a:t>
@@ -20272,6 +20373,7 @@
                   <a:srgbClr val="1B3B6F"/>
                 </a:solidFill>
                 <a:latin typeface="Amiri" pitchFamily="2" charset="-78"/>
+                <a:ea typeface="Amiri" pitchFamily="2" charset="-78"/>
                 <a:cs typeface="Amiri" pitchFamily="2" charset="-78"/>
               </a:rPr>
               <a:t>المَدَارِسُ بَرَامِجَ</a:t>
@@ -20386,6 +20488,7 @@
                   <a:srgbClr val="9AA1AB"/>
                 </a:solidFill>
                 <a:latin typeface="Amiri" pitchFamily="2" charset="-78"/>
+                <a:ea typeface="Amiri" pitchFamily="2" charset="-78"/>
                 <a:cs typeface="Amiri" pitchFamily="2" charset="-78"/>
               </a:rPr>
               <a:t>تُنَظِّمُ</a:t>
@@ -20527,6 +20630,7 @@
                   <a:srgbClr val="1F2A37"/>
                 </a:solidFill>
                 <a:latin typeface="Amiri" pitchFamily="2" charset="-78"/>
+                <a:ea typeface="Amiri" pitchFamily="2" charset="-78"/>
                 <a:cs typeface="Amiri" pitchFamily="2" charset="-78"/>
               </a:rPr>
               <a:t>تُنَظِّمَ</a:t>
@@ -20641,6 +20745,7 @@
                   <a:srgbClr val="9AA1AB"/>
                 </a:solidFill>
                 <a:latin typeface="Amiri" pitchFamily="2" charset="-78"/>
+                <a:ea typeface="Amiri" pitchFamily="2" charset="-78"/>
                 <a:cs typeface="Amiri" pitchFamily="2" charset="-78"/>
               </a:rPr>
               <a:t>نَظَّمَتْ</a:t>
@@ -20705,6 +20810,7 @@
                   <a:srgbClr val="8A6D1E"/>
                 </a:solidFill>
                 <a:latin typeface="Amiri" pitchFamily="2" charset="-78"/>
+                <a:ea typeface="Amiri" pitchFamily="2" charset="-78"/>
                 <a:cs typeface="Amiri" pitchFamily="2" charset="-78"/>
               </a:rPr>
               <a:t>أَنْ</a:t>
@@ -20731,6 +20837,7 @@
                   <a:srgbClr val="8A6D1E"/>
                 </a:solidFill>
                 <a:latin typeface="Amiri" pitchFamily="2" charset="-78"/>
+                <a:ea typeface="Amiri" pitchFamily="2" charset="-78"/>
                 <a:cs typeface="Amiri" pitchFamily="2" charset="-78"/>
               </a:rPr>
               <a:t>يَتَطَلَّبُ</a:t>
@@ -20757,6 +20864,7 @@
                   <a:srgbClr val="8A6D1E"/>
                 </a:solidFill>
                 <a:latin typeface="Amiri" pitchFamily="2" charset="-78"/>
+                <a:ea typeface="Amiri" pitchFamily="2" charset="-78"/>
                 <a:cs typeface="Amiri" pitchFamily="2" charset="-78"/>
               </a:rPr>
               <a:t>تُنَظِّمَ</a:t>
@@ -20918,6 +21026,7 @@
                   <a:srgbClr val="1B3B6F"/>
                 </a:solidFill>
                 <a:latin typeface="Amiri" pitchFamily="2" charset="-78"/>
+                <a:ea typeface="Amiri" pitchFamily="2" charset="-78"/>
                 <a:cs typeface="Amiri" pitchFamily="2" charset="-78"/>
               </a:rPr>
               <a:t>لَوْ شَارَكَ كُلُّ طَالِبٍ،</a:t>
@@ -20944,6 +21053,7 @@
                   <a:srgbClr val="1B3B6F"/>
                 </a:solidFill>
                 <a:latin typeface="Amiri" pitchFamily="2" charset="-78"/>
+                <a:ea typeface="Amiri" pitchFamily="2" charset="-78"/>
                 <a:cs typeface="Amiri" pitchFamily="2" charset="-78"/>
               </a:rPr>
               <a:t>الأَحْيَاءُ</a:t>
@@ -21058,6 +21168,7 @@
                   <a:srgbClr val="9AA1AB"/>
                 </a:solidFill>
                 <a:latin typeface="Amiri" pitchFamily="2" charset="-78"/>
+                <a:ea typeface="Amiri" pitchFamily="2" charset="-78"/>
                 <a:cs typeface="Amiri" pitchFamily="2" charset="-78"/>
               </a:rPr>
               <a:t>سَتَتَغَيَّرُ</a:t>
@@ -21172,6 +21283,7 @@
                   <a:srgbClr val="9AA1AB"/>
                 </a:solidFill>
                 <a:latin typeface="Amiri" pitchFamily="2" charset="-78"/>
+                <a:ea typeface="Amiri" pitchFamily="2" charset="-78"/>
                 <a:cs typeface="Amiri" pitchFamily="2" charset="-78"/>
               </a:rPr>
               <a:t>تَتَغَيَّرُ</a:t>
@@ -21313,6 +21425,7 @@
                   <a:srgbClr val="1F2A37"/>
                 </a:solidFill>
                 <a:latin typeface="Amiri" pitchFamily="2" charset="-78"/>
+                <a:ea typeface="Amiri" pitchFamily="2" charset="-78"/>
                 <a:cs typeface="Amiri" pitchFamily="2" charset="-78"/>
               </a:rPr>
               <a:t>لَتَغَيَّرَتِ</a:t>
@@ -21377,6 +21490,7 @@
                   <a:srgbClr val="8A6D1E"/>
                 </a:solidFill>
                 <a:latin typeface="Amiri" pitchFamily="2" charset="-78"/>
+                <a:ea typeface="Amiri" pitchFamily="2" charset="-78"/>
                 <a:cs typeface="Amiri" pitchFamily="2" charset="-78"/>
               </a:rPr>
               <a:t>لَوْ</a:t>
@@ -21403,6 +21517,7 @@
                   <a:srgbClr val="8A6D1E"/>
                 </a:solidFill>
                 <a:latin typeface="Amiri" pitchFamily="2" charset="-78"/>
+                <a:ea typeface="Amiri" pitchFamily="2" charset="-78"/>
                 <a:cs typeface="Amiri" pitchFamily="2" charset="-78"/>
               </a:rPr>
               <a:t>لَـ</a:t>
@@ -21429,6 +21544,7 @@
                   <a:srgbClr val="8A6D1E"/>
                 </a:solidFill>
                 <a:latin typeface="Amiri" pitchFamily="2" charset="-78"/>
+                <a:ea typeface="Amiri" pitchFamily="2" charset="-78"/>
                 <a:cs typeface="Amiri" pitchFamily="2" charset="-78"/>
               </a:rPr>
               <a:t>لَتَغَيَّرَتْ</a:t>
@@ -21575,6 +21691,7 @@
                   <a:srgbClr val="D4AF37"/>
                 </a:solidFill>
                 <a:latin typeface="Amiri" pitchFamily="2" charset="-78"/>
+                <a:ea typeface="Amiri" pitchFamily="2" charset="-78"/>
                 <a:cs typeface="Amiri" pitchFamily="2" charset="-78"/>
               </a:rPr>
               <a:t>م</a:t>
@@ -21895,6 +22012,7 @@
                   <a:srgbClr val="8A6D1E"/>
                 </a:solidFill>
                 <a:latin typeface="Amiri" pitchFamily="2" charset="-78"/>
+                <a:ea typeface="Amiri" pitchFamily="2" charset="-78"/>
                 <a:cs typeface="Amiri" pitchFamily="2" charset="-78"/>
               </a:rPr>
               <a:t>النَّصُّ</a:t>
@@ -22008,6 +22126,7 @@
                   <a:srgbClr val="1F2A37"/>
                 </a:solidFill>
                 <a:latin typeface="Amiri" pitchFamily="2" charset="-78"/>
+                <a:ea typeface="Amiri" pitchFamily="2" charset="-78"/>
                 <a:cs typeface="Amiri" pitchFamily="2" charset="-78"/>
               </a:rPr>
               <a:t>يَرَى الكَاتِبُ أَنَّ القِرَاءَةَ الحُرَّةَ تُنَمِّي الخَيَالَ أَكْثَرَ مِنَ الشَّاشَاتِ. لَا يُمْكِنُ إِنْكَارُ أَنَّ التِّقْنِيَّةَ مُفِيدَةٌ، غَيْرَ أَنَّ الإِفْرَاطَ فِيهَا يُضْعِفُ التَّرْكِيزَ. وَبِنَاءً عَلَى مَا سَبَقَ، يَنْبَغِي أَنْ نُوَازِنَ بَيْنَ الكِتَابِ وَالشَّاشَةِ.</a:t>
@@ -22118,6 +22237,7 @@
                   <a:srgbClr val="1B3B6F"/>
                 </a:solidFill>
                 <a:latin typeface="Amiri" pitchFamily="2" charset="-78"/>
+                <a:ea typeface="Amiri" pitchFamily="2" charset="-78"/>
                 <a:cs typeface="Amiri" pitchFamily="2" charset="-78"/>
               </a:rPr>
               <a:t>يَرَى الكَاتِبُ</a:t>
@@ -22194,6 +22314,7 @@
                   <a:srgbClr val="1B3B6F"/>
                 </a:solidFill>
                 <a:latin typeface="Amiri" pitchFamily="2" charset="-78"/>
+                <a:ea typeface="Amiri" pitchFamily="2" charset="-78"/>
                 <a:cs typeface="Amiri" pitchFamily="2" charset="-78"/>
               </a:rPr>
               <a:t>القِرَاءَةَ الحُرَّةَ</a:t>
@@ -22270,6 +22391,7 @@
                   <a:srgbClr val="1B3B6F"/>
                 </a:solidFill>
                 <a:latin typeface="Amiri" pitchFamily="2" charset="-78"/>
+                <a:ea typeface="Amiri" pitchFamily="2" charset="-78"/>
                 <a:cs typeface="Amiri" pitchFamily="2" charset="-78"/>
               </a:rPr>
               <a:t>تُنَمِّي الخَيَالَ</a:t>
@@ -22346,6 +22468,7 @@
                   <a:srgbClr val="1B3B6F"/>
                 </a:solidFill>
                 <a:latin typeface="Amiri" pitchFamily="2" charset="-78"/>
+                <a:ea typeface="Amiri" pitchFamily="2" charset="-78"/>
                 <a:cs typeface="Amiri" pitchFamily="2" charset="-78"/>
               </a:rPr>
               <a:t>لَا يُمْكِنُ إِنْكَارُ</a:t>
@@ -22422,6 +22545,7 @@
                   <a:srgbClr val="1B3B6F"/>
                 </a:solidFill>
                 <a:latin typeface="Amiri" pitchFamily="2" charset="-78"/>
+                <a:ea typeface="Amiri" pitchFamily="2" charset="-78"/>
                 <a:cs typeface="Amiri" pitchFamily="2" charset="-78"/>
               </a:rPr>
               <a:t>الإِفْرَاطَ</a:t>
@@ -22498,6 +22622,7 @@
                   <a:srgbClr val="1B3B6F"/>
                 </a:solidFill>
                 <a:latin typeface="Amiri" pitchFamily="2" charset="-78"/>
+                <a:ea typeface="Amiri" pitchFamily="2" charset="-78"/>
                 <a:cs typeface="Amiri" pitchFamily="2" charset="-78"/>
               </a:rPr>
               <a:t>يُضْعِفُ التَّرْكِيزَ</a:t>
@@ -22574,6 +22699,7 @@
                   <a:srgbClr val="1B3B6F"/>
                 </a:solidFill>
                 <a:latin typeface="Amiri" pitchFamily="2" charset="-78"/>
+                <a:ea typeface="Amiri" pitchFamily="2" charset="-78"/>
                 <a:cs typeface="Amiri" pitchFamily="2" charset="-78"/>
               </a:rPr>
               <a:t>نُوَازِنَ</a:t>
@@ -22745,6 +22871,7 @@
                   <a:srgbClr val="D4AF37"/>
                 </a:solidFill>
                 <a:latin typeface="Amiri" pitchFamily="2" charset="-78"/>
+                <a:ea typeface="Amiri" pitchFamily="2" charset="-78"/>
                 <a:cs typeface="Amiri" pitchFamily="2" charset="-78"/>
               </a:rPr>
               <a:t>م</a:t>
@@ -23065,6 +23192,7 @@
                   <a:srgbClr val="8A6D1E"/>
                 </a:solidFill>
                 <a:latin typeface="Amiri" pitchFamily="2" charset="-78"/>
+                <a:ea typeface="Amiri" pitchFamily="2" charset="-78"/>
                 <a:cs typeface="Amiri" pitchFamily="2" charset="-78"/>
               </a:rPr>
               <a:t>أَسْئِلَةُ القِرَاءَةِ</a:t>
@@ -23689,6 +23817,7 @@
                   <a:srgbClr val="1B3B6F"/>
                 </a:solidFill>
                 <a:latin typeface="Amiri" pitchFamily="2" charset="-78"/>
+                <a:ea typeface="Amiri" pitchFamily="2" charset="-78"/>
                 <a:cs typeface="Amiri" pitchFamily="2" charset="-78"/>
               </a:rPr>
               <a:t>لَا يُمْكِنُ إِنْكَارُ أَنَّ</a:t>
@@ -24153,6 +24282,7 @@
                   <a:srgbClr val="1B3B6F"/>
                 </a:solidFill>
                 <a:latin typeface="Amiri" pitchFamily="2" charset="-78"/>
+                <a:ea typeface="Amiri" pitchFamily="2" charset="-78"/>
                 <a:cs typeface="Amiri" pitchFamily="2" charset="-78"/>
               </a:rPr>
               <a:t>وَبِنَاءً عَلَى مَا سَبَقَ</a:t>
@@ -25916,6 +26046,7 @@
                   <a:srgbClr val="D4AF37"/>
                 </a:solidFill>
                 <a:latin typeface="Amiri" pitchFamily="2" charset="-78"/>
+                <a:ea typeface="Amiri" pitchFamily="2" charset="-78"/>
                 <a:cs typeface="Amiri" pitchFamily="2" charset="-78"/>
               </a:rPr>
               <a:t>م</a:t>
@@ -26236,6 +26367,7 @@
                   <a:srgbClr val="8A6D1E"/>
                 </a:solidFill>
                 <a:latin typeface="Amiri" pitchFamily="2" charset="-78"/>
+                <a:ea typeface="Amiri" pitchFamily="2" charset="-78"/>
                 <a:cs typeface="Amiri" pitchFamily="2" charset="-78"/>
               </a:rPr>
               <a:t>آدَابُ الصَّفِّ</a:t>
@@ -27767,6 +27899,7 @@
                   <a:srgbClr val="D4AF37"/>
                 </a:solidFill>
                 <a:latin typeface="Amiri" pitchFamily="2" charset="-78"/>
+                <a:ea typeface="Amiri" pitchFamily="2" charset="-78"/>
                 <a:cs typeface="Amiri" pitchFamily="2" charset="-78"/>
               </a:rPr>
               <a:t>م</a:t>
@@ -28087,6 +28220,7 @@
                   <a:srgbClr val="8A6D1E"/>
                 </a:solidFill>
                 <a:latin typeface="Amiri" pitchFamily="2" charset="-78"/>
+                <a:ea typeface="Amiri" pitchFamily="2" charset="-78"/>
                 <a:cs typeface="Amiri" pitchFamily="2" charset="-78"/>
               </a:rPr>
               <a:t>الإِجَابَاتُ</a:t>
@@ -28628,6 +28762,7 @@
                   <a:srgbClr val="8A6D1E"/>
                 </a:solidFill>
                 <a:latin typeface="Amiri" pitchFamily="2" charset="-78"/>
+                <a:ea typeface="Amiri" pitchFamily="2" charset="-78"/>
                 <a:cs typeface="Amiri" pitchFamily="2" charset="-78"/>
               </a:rPr>
               <a:t>لَا يُمْكِنُ إِنْكَارُ أَنَّ التِّقْنِيَّةَ مُفِيدَةٌ، غَيْرَ أَنَّ الإِفْرَاطَ فِيهَا يُضْعِفُ التَّرْكِيزَ.</a:t>
@@ -28776,6 +28911,7 @@
                   <a:srgbClr val="1B3B6F"/>
                 </a:solidFill>
                 <a:latin typeface="Amiri" pitchFamily="2" charset="-78"/>
+                <a:ea typeface="Amiri" pitchFamily="2" charset="-78"/>
                 <a:cs typeface="Amiri" pitchFamily="2" charset="-78"/>
               </a:rPr>
               <a:t>لَا يُمْكِنُ إِنْكَارُ أَنَّ</a:t>
@@ -29305,6 +29441,7 @@
                   <a:srgbClr val="1B3B6F"/>
                 </a:solidFill>
                 <a:latin typeface="Amiri" pitchFamily="2" charset="-78"/>
+                <a:ea typeface="Amiri" pitchFamily="2" charset="-78"/>
                 <a:cs typeface="Amiri" pitchFamily="2" charset="-78"/>
               </a:rPr>
               <a:t>وَبِنَاءً عَلَى مَا سَبَقَ</a:t>
@@ -29686,6 +29823,7 @@
                   <a:srgbClr val="8A6D1E"/>
                 </a:solidFill>
                 <a:latin typeface="Amiri" pitchFamily="2" charset="-78"/>
+                <a:ea typeface="Amiri" pitchFamily="2" charset="-78"/>
                 <a:cs typeface="Amiri" pitchFamily="2" charset="-78"/>
               </a:rPr>
               <a:t>وَبِنَاءً عَلَى مَا سَبَقَ</a:t>
@@ -30215,6 +30353,7 @@
                   <a:srgbClr val="8A6D1E"/>
                 </a:solidFill>
                 <a:latin typeface="Amiri" pitchFamily="2" charset="-78"/>
+                <a:ea typeface="Amiri" pitchFamily="2" charset="-78"/>
                 <a:cs typeface="Amiri" pitchFamily="2" charset="-78"/>
               </a:rPr>
               <a:t>القِرَاءَةُ الحُرَّةُ تُنَمِّي الخَيَالَ</a:t>
@@ -30744,6 +30883,7 @@
                   <a:srgbClr val="8A6D1E"/>
                 </a:solidFill>
                 <a:latin typeface="Amiri" pitchFamily="2" charset="-78"/>
+                <a:ea typeface="Amiri" pitchFamily="2" charset="-78"/>
                 <a:cs typeface="Amiri" pitchFamily="2" charset="-78"/>
               </a:rPr>
               <a:t>العَمَلُ التَّطَوُّعِيُّ يُقَوِّي رَوَابِطَ المُجْتَمَعِ</a:t>
@@ -31273,6 +31413,7 @@
                   <a:srgbClr val="8A6D1E"/>
                 </a:solidFill>
                 <a:latin typeface="Amiri" pitchFamily="2" charset="-78"/>
+                <a:ea typeface="Amiri" pitchFamily="2" charset="-78"/>
                 <a:cs typeface="Amiri" pitchFamily="2" charset="-78"/>
               </a:rPr>
               <a:t>تُغْلَقُ المَكْتَبَةُ فِي السَّاعَةِ الثَّامِنَةِ</a:t>
@@ -31419,6 +31560,7 @@
                   <a:srgbClr val="D4AF37"/>
                 </a:solidFill>
                 <a:latin typeface="Amiri" pitchFamily="2" charset="-78"/>
+                <a:ea typeface="Amiri" pitchFamily="2" charset="-78"/>
                 <a:cs typeface="Amiri" pitchFamily="2" charset="-78"/>
               </a:rPr>
               <a:t>م</a:t>
@@ -31739,6 +31881,7 @@
                   <a:srgbClr val="8A6D1E"/>
                 </a:solidFill>
                 <a:latin typeface="Amiri" pitchFamily="2" charset="-78"/>
+                <a:ea typeface="Amiri" pitchFamily="2" charset="-78"/>
                 <a:cs typeface="Amiri" pitchFamily="2" charset="-78"/>
               </a:rPr>
               <a:t>اُكْتُبْ</a:t>
@@ -31914,6 +32057,7 @@
                   <a:srgbClr val="2E8B57"/>
                 </a:solidFill>
                 <a:latin typeface="Amiri" pitchFamily="2" charset="-78"/>
+                <a:ea typeface="Amiri" pitchFamily="2" charset="-78"/>
                 <a:cs typeface="Amiri" pitchFamily="2" charset="-78"/>
               </a:rPr>
               <a:t>الأَسَاسُ</a:t>
@@ -32208,6 +32352,7 @@
                   <a:srgbClr val="C9780A"/>
                 </a:solidFill>
                 <a:latin typeface="Amiri" pitchFamily="2" charset="-78"/>
+                <a:ea typeface="Amiri" pitchFamily="2" charset="-78"/>
                 <a:cs typeface="Amiri" pitchFamily="2" charset="-78"/>
               </a:rPr>
               <a:t>التَّطْوِيرُ</a:t>
@@ -32502,6 +32647,7 @@
                   <a:srgbClr val="B83227"/>
                 </a:solidFill>
                 <a:latin typeface="Amiri" pitchFamily="2" charset="-78"/>
+                <a:ea typeface="Amiri" pitchFamily="2" charset="-78"/>
                 <a:cs typeface="Amiri" pitchFamily="2" charset="-78"/>
               </a:rPr>
               <a:t>التَّحَدِّي</a:t>
@@ -32654,11 +32800,12 @@
               <a:buNone/>
             </a:pPr>
             <a:r>
-              <a:rPr lang="en-US" sz="1150" dirty="0">
+              <a:rPr lang="ar-SA" sz="1150" dirty="0">
                 <a:solidFill>
                   <a:srgbClr val="1F2A37"/>
                 </a:solidFill>
                 <a:latin typeface="Calibri" pitchFamily="34" charset="0"/>
+                <a:ea typeface="Amiri" pitchFamily="2" charset="-78"/>
                 <a:cs typeface="Amiri" pitchFamily="2" charset="-78"/>
               </a:rPr>
               <a:t>Use the frames: يَدُلُّ … عَلَى أَنَّ … · لِذٰلِكَ أَرَى أَنَّ مَوْقِفَهُ مُتَوَازِنٌ.</a:t>
@@ -32792,6 +32939,7 @@
                   <a:srgbClr val="D4AF37"/>
                 </a:solidFill>
                 <a:latin typeface="Amiri" pitchFamily="2" charset="-78"/>
+                <a:ea typeface="Amiri" pitchFamily="2" charset="-78"/>
                 <a:cs typeface="Amiri" pitchFamily="2" charset="-78"/>
               </a:rPr>
               <a:t>م</a:t>
@@ -33112,6 +33260,7 @@
                   <a:srgbClr val="8A6D1E"/>
                 </a:solidFill>
                 <a:latin typeface="Amiri" pitchFamily="2" charset="-78"/>
+                <a:ea typeface="Amiri" pitchFamily="2" charset="-78"/>
                 <a:cs typeface="Amiri" pitchFamily="2" charset="-78"/>
               </a:rPr>
               <a:t>قَوَالِبُ التَّحْلِيلِ</a:t>
@@ -33287,6 +33436,7 @@
                   <a:srgbClr val="1B3B6F"/>
                 </a:solidFill>
                 <a:latin typeface="Amiri" pitchFamily="2" charset="-78"/>
+                <a:ea typeface="Amiri" pitchFamily="2" charset="-78"/>
                 <a:cs typeface="Amiri" pitchFamily="2" charset="-78"/>
               </a:rPr>
               <a:t>يَرَى الكَاتِبُ أَنَّ ______ .</a:t>
@@ -33363,6 +33513,7 @@
                   <a:srgbClr val="1B3B6F"/>
                 </a:solidFill>
                 <a:latin typeface="Amiri" pitchFamily="2" charset="-78"/>
+                <a:ea typeface="Amiri" pitchFamily="2" charset="-78"/>
                 <a:cs typeface="Amiri" pitchFamily="2" charset="-78"/>
               </a:rPr>
               <a:t>«لَا يُمْكِنُ إِنْكَارُ أَنَّ» يَدُلُّ عَلَى أَنَّ الكَاتِبَ ______ .</a:t>
@@ -33439,6 +33590,7 @@
                   <a:srgbClr val="1B3B6F"/>
                 </a:solidFill>
                 <a:latin typeface="Amiri" pitchFamily="2" charset="-78"/>
+                <a:ea typeface="Amiri" pitchFamily="2" charset="-78"/>
                 <a:cs typeface="Amiri" pitchFamily="2" charset="-78"/>
               </a:rPr>
               <a:t>«وَبِنَاءً عَلَى مَا سَبَقَ» تَفْتَحُ ______ .</a:t>
@@ -33515,6 +33667,7 @@
                   <a:srgbClr val="1B3B6F"/>
                 </a:solidFill>
                 <a:latin typeface="Amiri" pitchFamily="2" charset="-78"/>
+                <a:ea typeface="Amiri" pitchFamily="2" charset="-78"/>
                 <a:cs typeface="Amiri" pitchFamily="2" charset="-78"/>
               </a:rPr>
               <a:t>لِذٰلِكَ أَرَى أَنَّ مَوْقِفَهُ مُتَوَازِنٌ.</a:t>
@@ -33690,6 +33843,7 @@
                   <a:srgbClr val="1B3B6F"/>
                 </a:solidFill>
                 <a:latin typeface="Amiri" pitchFamily="2" charset="-78"/>
+                <a:ea typeface="Amiri" pitchFamily="2" charset="-78"/>
                 <a:cs typeface="Amiri" pitchFamily="2" charset="-78"/>
               </a:rPr>
               <a:t>المُسَبِّبُ فِي الجُمْلَةِ هُوَ « ______ ».</a:t>
@@ -33766,6 +33920,7 @@
                   <a:srgbClr val="1B3B6F"/>
                 </a:solidFill>
                 <a:latin typeface="Amiri" pitchFamily="2" charset="-78"/>
+                <a:ea typeface="Amiri" pitchFamily="2" charset="-78"/>
                 <a:cs typeface="Amiri" pitchFamily="2" charset="-78"/>
               </a:rPr>
               <a:t>لِذٰلِكَ يَنْتَهِي الفِعْلُ بِالفَتْحَةِ: ______ .</a:t>
@@ -33842,6 +33997,7 @@
                   <a:srgbClr val="1B3B6F"/>
                 </a:solidFill>
                 <a:latin typeface="Amiri" pitchFamily="2" charset="-78"/>
+                <a:ea typeface="Amiri" pitchFamily="2" charset="-78"/>
                 <a:cs typeface="Amiri" pitchFamily="2" charset="-78"/>
               </a:rPr>
               <a:t>بَعْدَ «صَحِيحٌ أَنَّ» نَجِدُ وَاقِعًا: ______ .</a:t>
@@ -33918,6 +34074,7 @@
                   <a:srgbClr val="1B3B6F"/>
                 </a:solidFill>
                 <a:latin typeface="Amiri" pitchFamily="2" charset="-78"/>
+                <a:ea typeface="Amiri" pitchFamily="2" charset="-78"/>
                 <a:cs typeface="Amiri" pitchFamily="2" charset="-78"/>
               </a:rPr>
               <a:t>جَوَابُ «لَوْ» يَبْدَأُ بِاللَّامِ: ______ .</a:t>
@@ -34066,6 +34223,7 @@
                   <a:srgbClr val="1B3B6F"/>
                 </a:solidFill>
                 <a:latin typeface="Amiri" pitchFamily="2" charset="-78"/>
+                <a:ea typeface="Amiri" pitchFamily="2" charset="-78"/>
                 <a:cs typeface="Amiri" pitchFamily="2" charset="-78"/>
               </a:rPr>
               <a:t>أَنْ تُنَظِّمَ  ·  لَتَغَيَّرَتْ  ·  مَحْدُودٌ  ·  يَتَطَلَّبُ  ·  القِرَاءَةَ الحُرَّةَ تُنَمِّي الخَيَالَ  ·  يُسَلِّمُ بِفَائِدَةِ التِّقْنِيَّةِ  ·  قَبْلَ أَنْ يَرُدَّ  ·  الخَاتِمَةَ  ·  مُتَوَازِنٌ  ·  أُحَادِيٌّ  ·  الإِفْرَاطَ  ·  التَّرْكِيزَ</a:t>
@@ -34199,6 +34357,7 @@
                   <a:srgbClr val="D4AF37"/>
                 </a:solidFill>
                 <a:latin typeface="Amiri" pitchFamily="2" charset="-78"/>
+                <a:ea typeface="Amiri" pitchFamily="2" charset="-78"/>
                 <a:cs typeface="Amiri" pitchFamily="2" charset="-78"/>
               </a:rPr>
               <a:t>م</a:t>
@@ -34519,6 +34678,7 @@
                   <a:srgbClr val="8A6D1E"/>
                 </a:solidFill>
                 <a:latin typeface="Amiri" pitchFamily="2" charset="-78"/>
+                <a:ea typeface="Amiri" pitchFamily="2" charset="-78"/>
                 <a:cs typeface="Amiri" pitchFamily="2" charset="-78"/>
               </a:rPr>
               <a:t>نَمُوذَجُ الإِجَابَةِ</a:t>
@@ -34632,6 +34792,7 @@
                   <a:srgbClr val="1F2A37"/>
                 </a:solidFill>
                 <a:latin typeface="Amiri" pitchFamily="2" charset="-78"/>
+                <a:ea typeface="Amiri" pitchFamily="2" charset="-78"/>
                 <a:cs typeface="Amiri" pitchFamily="2" charset="-78"/>
               </a:rPr>
               <a:t>يَرَى الكَاتِبُ أَنَّ القِرَاءَةَ الحُرَّةَ تُنَمِّي الخَيَالَ أَكْثَرَ مِنَ الشَّاشَاتِ. وَعِبَارَةُ «لَا يُمْكِنُ إِنْكَارُ أَنَّ التِّقْنِيَّةَ مُفِيدَةٌ» تَدُلُّ عَلَى أَنَّهُ يُسَلِّمُ بِفَائِدَةِ التِّقْنِيَّةِ قَبْلَ أَنْ يَرُدَّ بِـ«غَيْرَ أَنَّ». ثُمَّ تَفْتَحُ «وَبِنَاءً عَلَى مَا سَبَقَ» الخَاتِمَةَ. لِذٰلِكَ أَرَى أَنَّ مَوْقِفَهُ مُتَوَازِنٌ لَا أُحَادِيٌّ.</a:t>
@@ -35128,6 +35289,7 @@
                   <a:srgbClr val="D4AF37"/>
                 </a:solidFill>
                 <a:latin typeface="Amiri" pitchFamily="2" charset="-78"/>
+                <a:ea typeface="Amiri" pitchFamily="2" charset="-78"/>
                 <a:cs typeface="Amiri" pitchFamily="2" charset="-78"/>
               </a:rPr>
               <a:t>م</a:t>
@@ -35448,6 +35610,7 @@
                   <a:srgbClr val="8A6D1E"/>
                 </a:solidFill>
                 <a:latin typeface="Amiri" pitchFamily="2" charset="-78"/>
+                <a:ea typeface="Amiri" pitchFamily="2" charset="-78"/>
                 <a:cs typeface="Amiri" pitchFamily="2" charset="-78"/>
               </a:rPr>
               <a:t>تَحْلِيلُ الأَدَاءِ</a:t>
@@ -36501,6 +36664,7 @@
                   <a:srgbClr val="D4AF37"/>
                 </a:solidFill>
                 <a:latin typeface="Amiri" pitchFamily="2" charset="-78"/>
+                <a:ea typeface="Amiri" pitchFamily="2" charset="-78"/>
                 <a:cs typeface="Amiri" pitchFamily="2" charset="-78"/>
               </a:rPr>
               <a:t>م</a:t>
@@ -36821,6 +36985,7 @@
                   <a:srgbClr val="8A6D1E"/>
                 </a:solidFill>
                 <a:latin typeface="Amiri" pitchFamily="2" charset="-78"/>
+                <a:ea typeface="Amiri" pitchFamily="2" charset="-78"/>
                 <a:cs typeface="Amiri" pitchFamily="2" charset="-78"/>
               </a:rPr>
               <a:t>التَّأَمُّلُ</a:t>
@@ -37345,6 +37510,7 @@
                   <a:srgbClr val="1B3B6F"/>
                 </a:solidFill>
                 <a:latin typeface="Amiri" pitchFamily="2" charset="-78"/>
+                <a:ea typeface="Amiri" pitchFamily="2" charset="-78"/>
                 <a:cs typeface="Amiri" pitchFamily="2" charset="-78"/>
               </a:rPr>
               <a:t>المَعْنَى العَامُّ</a:t>
@@ -37421,6 +37587,7 @@
                   <a:srgbClr val="1B3B6F"/>
                 </a:solidFill>
                 <a:latin typeface="Amiri" pitchFamily="2" charset="-78"/>
+                <a:ea typeface="Amiri" pitchFamily="2" charset="-78"/>
                 <a:cs typeface="Amiri" pitchFamily="2" charset="-78"/>
               </a:rPr>
               <a:t>أَقْوَى مُسْتَوًى عِنْدِي هُوَ ______ .</a:t>
@@ -37592,6 +37759,7 @@
                   <a:srgbClr val="D4AF37"/>
                 </a:solidFill>
                 <a:latin typeface="Amiri" pitchFamily="2" charset="-78"/>
+                <a:ea typeface="Amiri" pitchFamily="2" charset="-78"/>
                 <a:cs typeface="Amiri" pitchFamily="2" charset="-78"/>
               </a:rPr>
               <a:t>م</a:t>
@@ -37912,6 +38080,7 @@
                   <a:srgbClr val="8A6D1E"/>
                 </a:solidFill>
                 <a:latin typeface="Amiri" pitchFamily="2" charset="-78"/>
+                <a:ea typeface="Amiri" pitchFamily="2" charset="-78"/>
                 <a:cs typeface="Amiri" pitchFamily="2" charset="-78"/>
               </a:rPr>
               <a:t>قَيِّمْ عَمَلَكَ</a:t>
@@ -39069,6 +39238,7 @@
                   <a:srgbClr val="D4AF37"/>
                 </a:solidFill>
                 <a:latin typeface="Amiri" pitchFamily="2" charset="-78"/>
+                <a:ea typeface="Amiri" pitchFamily="2" charset="-78"/>
                 <a:cs typeface="Amiri" pitchFamily="2" charset="-78"/>
               </a:rPr>
               <a:t>م</a:t>
@@ -39389,6 +39559,7 @@
                   <a:srgbClr val="8A6D1E"/>
                 </a:solidFill>
                 <a:latin typeface="Amiri" pitchFamily="2" charset="-78"/>
+                <a:ea typeface="Amiri" pitchFamily="2" charset="-78"/>
                 <a:cs typeface="Amiri" pitchFamily="2" charset="-78"/>
               </a:rPr>
               <a:t>التَّحْضِيرُ لِلدَّرْسِ القَادِمِ</a:t>
@@ -39602,6 +39773,7 @@
                   <a:srgbClr val="1B3B6F"/>
                 </a:solidFill>
                 <a:latin typeface="Amiri" pitchFamily="2" charset="-78"/>
+                <a:ea typeface="Amiri" pitchFamily="2" charset="-78"/>
                 <a:cs typeface="Amiri" pitchFamily="2" charset="-78"/>
               </a:rPr>
               <a:t>الكِتَابَةُ المُوَجَّهَةُ</a:t>
@@ -39691,6 +39863,7 @@
                   <a:srgbClr val="1B3B6F"/>
                 </a:solidFill>
                 <a:latin typeface="Amiri" pitchFamily="2" charset="-78"/>
+                <a:ea typeface="Amiri" pitchFamily="2" charset="-78"/>
                 <a:cs typeface="Amiri" pitchFamily="2" charset="-78"/>
               </a:rPr>
               <a:t>خِطَابٌ رَسْمِيٌّ</a:t>
@@ -39737,11 +39910,12 @@
               <a:buNone/>
             </a:pPr>
             <a:r>
-              <a:rPr lang="en-US" sz="1000" i="1" dirty="0">
+              <a:rPr lang="ar-SA" sz="1000" i="1" dirty="0">
                 <a:solidFill>
                   <a:srgbClr val="5A6472"/>
                 </a:solidFill>
                 <a:latin typeface="Calibri" pitchFamily="34" charset="0"/>
+                <a:ea typeface="Amiri" pitchFamily="2" charset="-78"/>
                 <a:cs typeface="Amiri" pitchFamily="2" charset="-78"/>
               </a:rPr>
               <a:t>  pl. خِطَابَاتٌ</a:t>
@@ -39780,6 +39954,7 @@
                   <a:srgbClr val="1B3B6F"/>
                 </a:solidFill>
                 <a:latin typeface="Amiri" pitchFamily="2" charset="-78"/>
+                <a:ea typeface="Amiri" pitchFamily="2" charset="-78"/>
                 <a:cs typeface="Amiri" pitchFamily="2" charset="-78"/>
               </a:rPr>
               <a:t>صِيغَةٌ رَسْمِيَّةٌ</a:t>
@@ -39826,11 +40001,12 @@
               <a:buNone/>
             </a:pPr>
             <a:r>
-              <a:rPr lang="en-US" sz="1000" i="1" dirty="0">
+              <a:rPr lang="ar-SA" sz="1000" i="1" dirty="0">
                 <a:solidFill>
                   <a:srgbClr val="5A6472"/>
                 </a:solidFill>
                 <a:latin typeface="Calibri" pitchFamily="34" charset="0"/>
+                <a:ea typeface="Amiri" pitchFamily="2" charset="-78"/>
                 <a:cs typeface="Amiri" pitchFamily="2" charset="-78"/>
               </a:rPr>
               <a:t>  ≠ غَيْرُ رَسْمِيَّةٍ</a:t>
@@ -39869,6 +40045,7 @@
                   <a:srgbClr val="1B3B6F"/>
                 </a:solidFill>
                 <a:latin typeface="Amiri" pitchFamily="2" charset="-78"/>
+                <a:ea typeface="Amiri" pitchFamily="2" charset="-78"/>
                 <a:cs typeface="Amiri" pitchFamily="2" charset="-78"/>
               </a:rPr>
               <a:t>أَتَشَرَّفُ بِمُخَاطَبَتِكُمْ</a:t>
@@ -39958,6 +40135,7 @@
                   <a:srgbClr val="1B3B6F"/>
                 </a:solidFill>
                 <a:latin typeface="Amiri" pitchFamily="2" charset="-78"/>
+                <a:ea typeface="Amiri" pitchFamily="2" charset="-78"/>
                 <a:cs typeface="Amiri" pitchFamily="2" charset="-78"/>
               </a:rPr>
               <a:t>وَتَفَضَّلُوا بِقَبُولِ الاحْتِرَامِ</a:t>
@@ -40126,6 +40304,7 @@
                   <a:srgbClr val="1B3B6F"/>
                 </a:solidFill>
                 <a:latin typeface="Amiri" pitchFamily="2" charset="-78"/>
+                <a:ea typeface="Amiri" pitchFamily="2" charset="-78"/>
                 <a:cs typeface="Amiri" pitchFamily="2" charset="-78"/>
               </a:rPr>
               <a:t>أَبْدَأُ الخِطَابَ الرَّسْمِيَّ بِعِبَارَةِ « ______ ».</a:t>
@@ -40795,6 +40974,7 @@
                   <a:srgbClr val="FFFFFF"/>
                 </a:solidFill>
                 <a:latin typeface="Amiri" pitchFamily="2" charset="-78"/>
+                <a:ea typeface="Amiri" pitchFamily="2" charset="-78"/>
                 <a:cs typeface="Amiri" pitchFamily="2" charset="-78"/>
               </a:rPr>
               <a:t>أَحْسَنْتُمْ! إِلَى اللِّقَاءِ</a:t>
@@ -40947,6 +41127,7 @@
                   <a:srgbClr val="D4AF37"/>
                 </a:solidFill>
                 <a:latin typeface="Amiri" pitchFamily="2" charset="-78"/>
+                <a:ea typeface="Amiri" pitchFamily="2" charset="-78"/>
                 <a:cs typeface="Amiri" pitchFamily="2" charset="-78"/>
               </a:rPr>
               <a:t>الوَرَقَةُ الرَّابِعَةُ — الكِتَابَةُ المُوَجَّهَةُ</a:t>
@@ -41080,6 +41261,7 @@
                   <a:srgbClr val="D4AF37"/>
                 </a:solidFill>
                 <a:latin typeface="Amiri" pitchFamily="2" charset="-78"/>
+                <a:ea typeface="Amiri" pitchFamily="2" charset="-78"/>
                 <a:cs typeface="Amiri" pitchFamily="2" charset="-78"/>
               </a:rPr>
               <a:t>م</a:t>
@@ -41400,6 +41582,7 @@
                   <a:srgbClr val="8A6D1E"/>
                 </a:solidFill>
                 <a:latin typeface="Amiri" pitchFamily="2" charset="-78"/>
+                <a:ea typeface="Amiri" pitchFamily="2" charset="-78"/>
                 <a:cs typeface="Amiri" pitchFamily="2" charset="-78"/>
               </a:rPr>
               <a:t>خَرِيطَةُ الدَّرْسِ</a:t>
@@ -41714,6 +41897,7 @@
                   <a:srgbClr val="0E7C86"/>
                 </a:solidFill>
                 <a:latin typeface="Amiri" pitchFamily="2" charset="-78"/>
+                <a:ea typeface="Amiri" pitchFamily="2" charset="-78"/>
                 <a:cs typeface="Amiri" pitchFamily="2" charset="-78"/>
               </a:rPr>
               <a:t>اِبْدَأِ الآنَ</a:t>
@@ -41990,6 +42174,7 @@
                   <a:srgbClr val="1B3B6F"/>
                 </a:solidFill>
                 <a:latin typeface="Amiri" pitchFamily="2" charset="-78"/>
+                <a:ea typeface="Amiri" pitchFamily="2" charset="-78"/>
                 <a:cs typeface="Amiri" pitchFamily="2" charset="-78"/>
               </a:rPr>
               <a:t>المُسْتَوَيَاتُ</a:t>
@@ -42266,6 +42451,7 @@
                   <a:srgbClr val="6B4C9A"/>
                 </a:solidFill>
                 <a:latin typeface="Amiri" pitchFamily="2" charset="-78"/>
+                <a:ea typeface="Amiri" pitchFamily="2" charset="-78"/>
                 <a:cs typeface="Amiri" pitchFamily="2" charset="-78"/>
               </a:rPr>
               <a:t>شَاهِدْ</a:t>
@@ -42542,6 +42728,7 @@
                   <a:srgbClr val="2F6FB0"/>
                 </a:solidFill>
                 <a:latin typeface="Amiri" pitchFamily="2" charset="-78"/>
+                <a:ea typeface="Amiri" pitchFamily="2" charset="-78"/>
                 <a:cs typeface="Amiri" pitchFamily="2" charset="-78"/>
               </a:rPr>
               <a:t>النُّصُوصُ الثَّلَاثَةُ</a:t>
@@ -42818,6 +43005,7 @@
                   <a:srgbClr val="1E6B52"/>
                 </a:solidFill>
                 <a:latin typeface="Amiri" pitchFamily="2" charset="-78"/>
+                <a:ea typeface="Amiri" pitchFamily="2" charset="-78"/>
                 <a:cs typeface="Amiri" pitchFamily="2" charset="-78"/>
               </a:rPr>
               <a:t>اُكْتُبْ</a:t>
@@ -43094,6 +43282,7 @@
                   <a:srgbClr val="8A6D1E"/>
                 </a:solidFill>
                 <a:latin typeface="Amiri" pitchFamily="2" charset="-78"/>
+                <a:ea typeface="Amiri" pitchFamily="2" charset="-78"/>
                 <a:cs typeface="Amiri" pitchFamily="2" charset="-78"/>
               </a:rPr>
               <a:t>قَيِّمْ</a:t>
@@ -43370,6 +43559,7 @@
                   <a:srgbClr val="C45A3C"/>
                 </a:solidFill>
                 <a:latin typeface="Amiri" pitchFamily="2" charset="-78"/>
+                <a:ea typeface="Amiri" pitchFamily="2" charset="-78"/>
                 <a:cs typeface="Amiri" pitchFamily="2" charset="-78"/>
               </a:rPr>
               <a:t>اِسْتَعِدَّ</a:t>
@@ -43613,6 +43803,7 @@
                   <a:srgbClr val="D4AF37"/>
                 </a:solidFill>
                 <a:latin typeface="Amiri" pitchFamily="2" charset="-78"/>
+                <a:ea typeface="Amiri" pitchFamily="2" charset="-78"/>
                 <a:cs typeface="Amiri" pitchFamily="2" charset="-78"/>
               </a:rPr>
               <a:t>م</a:t>
@@ -43933,6 +44124,7 @@
                   <a:srgbClr val="8A6D1E"/>
                 </a:solidFill>
                 <a:latin typeface="Amiri" pitchFamily="2" charset="-78"/>
+                <a:ea typeface="Amiri" pitchFamily="2" charset="-78"/>
                 <a:cs typeface="Amiri" pitchFamily="2" charset="-78"/>
               </a:rPr>
               <a:t>اِبْدَأِ الآنَ</a:t>
@@ -44119,6 +44311,7 @@
                   <a:srgbClr val="1B3B6F"/>
                 </a:solidFill>
                 <a:latin typeface="Amiri" pitchFamily="2" charset="-78"/>
+                <a:ea typeface="Amiri" pitchFamily="2" charset="-78"/>
                 <a:cs typeface="Amiri" pitchFamily="2" charset="-78"/>
               </a:rPr>
               <a:t>المَعْنَى العَامُّ</a:t>
@@ -44583,6 +44776,7 @@
                   <a:srgbClr val="1B3B6F"/>
                 </a:solidFill>
                 <a:latin typeface="Amiri" pitchFamily="2" charset="-78"/>
+                <a:ea typeface="Amiri" pitchFamily="2" charset="-78"/>
                 <a:cs typeface="Amiri" pitchFamily="2" charset="-78"/>
               </a:rPr>
               <a:t>الأَدِلَّةُ النَّصِّيَّةُ</a:t>
@@ -45047,6 +45241,7 @@
                   <a:srgbClr val="1B3B6F"/>
                 </a:solidFill>
                 <a:latin typeface="Amiri" pitchFamily="2" charset="-78"/>
+                <a:ea typeface="Amiri" pitchFamily="2" charset="-78"/>
                 <a:cs typeface="Amiri" pitchFamily="2" charset="-78"/>
               </a:rPr>
               <a:t>اسْتِنْتَاجُ الكَلِمَاتِ المَجْهُولَةِ</a:t>
@@ -45511,6 +45706,7 @@
                   <a:srgbClr val="1B3B6F"/>
                 </a:solidFill>
                 <a:latin typeface="Amiri" pitchFamily="2" charset="-78"/>
+                <a:ea typeface="Amiri" pitchFamily="2" charset="-78"/>
                 <a:cs typeface="Amiri" pitchFamily="2" charset="-78"/>
               </a:rPr>
               <a:t>صَحِيحٌ أَنَّ الدَّوْلَةَ</a:t>
@@ -45537,6 +45733,7 @@
                   <a:srgbClr val="1B3B6F"/>
                 </a:solidFill>
                 <a:latin typeface="Amiri" pitchFamily="2" charset="-78"/>
+                <a:ea typeface="Amiri" pitchFamily="2" charset="-78"/>
                 <a:cs typeface="Amiri" pitchFamily="2" charset="-78"/>
               </a:rPr>
               <a:t>إِجْرَاءَاتٍ</a:t>
@@ -45651,6 +45848,7 @@
                   <a:srgbClr val="1F2A37"/>
                 </a:solidFill>
                 <a:latin typeface="Amiri" pitchFamily="2" charset="-78"/>
+                <a:ea typeface="Amiri" pitchFamily="2" charset="-78"/>
                 <a:cs typeface="Amiri" pitchFamily="2" charset="-78"/>
               </a:rPr>
               <a:t>تَتَّخِذَ</a:t>
@@ -45752,6 +45950,7 @@
                   <a:srgbClr val="1F2A37"/>
                 </a:solidFill>
                 <a:latin typeface="Amiri" pitchFamily="2" charset="-78"/>
+                <a:ea typeface="Amiri" pitchFamily="2" charset="-78"/>
                 <a:cs typeface="Amiri" pitchFamily="2" charset="-78"/>
               </a:rPr>
               <a:t>تَتَّخِذْ</a:t>
@@ -45853,6 +46052,7 @@
                   <a:srgbClr val="1F2A37"/>
                 </a:solidFill>
                 <a:latin typeface="Amiri" pitchFamily="2" charset="-78"/>
+                <a:ea typeface="Amiri" pitchFamily="2" charset="-78"/>
                 <a:cs typeface="Amiri" pitchFamily="2" charset="-78"/>
               </a:rPr>
               <a:t>تَتَّخِذُ</a:t>
@@ -46001,6 +46201,7 @@
                   <a:srgbClr val="1B3B6F"/>
                 </a:solidFill>
                 <a:latin typeface="Amiri" pitchFamily="2" charset="-78"/>
+                <a:ea typeface="Amiri" pitchFamily="2" charset="-78"/>
                 <a:cs typeface="Amiri" pitchFamily="2" charset="-78"/>
               </a:rPr>
               <a:t>يَتَطَلَّبُ الأَمْرُ أَنْ</a:t>
@@ -46027,6 +46228,7 @@
                   <a:srgbClr val="1B3B6F"/>
                 </a:solidFill>
                 <a:latin typeface="Amiri" pitchFamily="2" charset="-78"/>
+                <a:ea typeface="Amiri" pitchFamily="2" charset="-78"/>
                 <a:cs typeface="Amiri" pitchFamily="2" charset="-78"/>
               </a:rPr>
               <a:t>الحُكُومَاتُ</a:t>
@@ -46141,6 +46343,7 @@
                   <a:srgbClr val="1F2A37"/>
                 </a:solidFill>
                 <a:latin typeface="Amiri" pitchFamily="2" charset="-78"/>
+                <a:ea typeface="Amiri" pitchFamily="2" charset="-78"/>
                 <a:cs typeface="Amiri" pitchFamily="2" charset="-78"/>
               </a:rPr>
               <a:t>تَتَحَرَّكَ</a:t>
@@ -46242,6 +46445,7 @@
                   <a:srgbClr val="1F2A37"/>
                 </a:solidFill>
                 <a:latin typeface="Amiri" pitchFamily="2" charset="-78"/>
+                <a:ea typeface="Amiri" pitchFamily="2" charset="-78"/>
                 <a:cs typeface="Amiri" pitchFamily="2" charset="-78"/>
               </a:rPr>
               <a:t>تَتَحَرَّكُ</a:t>
@@ -46343,6 +46547,7 @@
                   <a:srgbClr val="1F2A37"/>
                 </a:solidFill>
                 <a:latin typeface="Amiri" pitchFamily="2" charset="-78"/>
+                <a:ea typeface="Amiri" pitchFamily="2" charset="-78"/>
                 <a:cs typeface="Amiri" pitchFamily="2" charset="-78"/>
               </a:rPr>
               <a:t>تَحَرَّكَتْ</a:t>
@@ -46678,6 +46883,7 @@
                   <a:srgbClr val="D4AF37"/>
                 </a:solidFill>
                 <a:latin typeface="Amiri" pitchFamily="2" charset="-78"/>
+                <a:ea typeface="Amiri" pitchFamily="2" charset="-78"/>
                 <a:cs typeface="Amiri" pitchFamily="2" charset="-78"/>
               </a:rPr>
               <a:t>م</a:t>
@@ -46998,6 +47204,7 @@
                   <a:srgbClr val="8A6D1E"/>
                 </a:solidFill>
                 <a:latin typeface="Amiri" pitchFamily="2" charset="-78"/>
+                <a:ea typeface="Amiri" pitchFamily="2" charset="-78"/>
                 <a:cs typeface="Amiri" pitchFamily="2" charset="-78"/>
               </a:rPr>
               <a:t>الإِجَابَاتُ وَالتَّعْلِيلُ</a:t>
@@ -47184,6 +47391,7 @@
                   <a:srgbClr val="1B3B6F"/>
                 </a:solidFill>
                 <a:latin typeface="Amiri" pitchFamily="2" charset="-78"/>
+                <a:ea typeface="Amiri" pitchFamily="2" charset="-78"/>
                 <a:cs typeface="Amiri" pitchFamily="2" charset="-78"/>
               </a:rPr>
               <a:t>المَعْنَى العَامُّ</a:t>
@@ -47713,6 +47921,7 @@
                   <a:srgbClr val="1B3B6F"/>
                 </a:solidFill>
                 <a:latin typeface="Amiri" pitchFamily="2" charset="-78"/>
+                <a:ea typeface="Amiri" pitchFamily="2" charset="-78"/>
                 <a:cs typeface="Amiri" pitchFamily="2" charset="-78"/>
               </a:rPr>
               <a:t>الأَدِلَّةُ النَّصِّيَّةُ</a:t>
@@ -48242,6 +48451,7 @@
                   <a:srgbClr val="1B3B6F"/>
                 </a:solidFill>
                 <a:latin typeface="Amiri" pitchFamily="2" charset="-78"/>
+                <a:ea typeface="Amiri" pitchFamily="2" charset="-78"/>
                 <a:cs typeface="Amiri" pitchFamily="2" charset="-78"/>
               </a:rPr>
               <a:t>اسْتِنْتَاجُ الكَلِمَاتِ المَجْهُولَةِ</a:t>
@@ -48771,6 +48981,7 @@
                   <a:srgbClr val="1B3B6F"/>
                 </a:solidFill>
                 <a:latin typeface="Amiri" pitchFamily="2" charset="-78"/>
+                <a:ea typeface="Amiri" pitchFamily="2" charset="-78"/>
                 <a:cs typeface="Amiri" pitchFamily="2" charset="-78"/>
               </a:rPr>
               <a:t>صَحِيحٌ أَنَّ الدَّوْلَةَ</a:t>
@@ -48797,6 +49008,7 @@
                   <a:srgbClr val="1B3B6F"/>
                 </a:solidFill>
                 <a:latin typeface="Amiri" pitchFamily="2" charset="-78"/>
+                <a:ea typeface="Amiri" pitchFamily="2" charset="-78"/>
                 <a:cs typeface="Amiri" pitchFamily="2" charset="-78"/>
               </a:rPr>
               <a:t>إِجْرَاءَاتٍ</a:t>
@@ -48911,6 +49123,7 @@
                   <a:srgbClr val="9AA1AB"/>
                 </a:solidFill>
                 <a:latin typeface="Amiri" pitchFamily="2" charset="-78"/>
+                <a:ea typeface="Amiri" pitchFamily="2" charset="-78"/>
                 <a:cs typeface="Amiri" pitchFamily="2" charset="-78"/>
               </a:rPr>
               <a:t>تَتَّخِذَ</a:t>
@@ -49012,6 +49225,7 @@
                   <a:srgbClr val="9AA1AB"/>
                 </a:solidFill>
                 <a:latin typeface="Amiri" pitchFamily="2" charset="-78"/>
+                <a:ea typeface="Amiri" pitchFamily="2" charset="-78"/>
                 <a:cs typeface="Amiri" pitchFamily="2" charset="-78"/>
               </a:rPr>
               <a:t>تَتَّخِذْ</a:t>
@@ -49140,6 +49354,7 @@
                   <a:srgbClr val="1F2A37"/>
                 </a:solidFill>
                 <a:latin typeface="Amiri" pitchFamily="2" charset="-78"/>
+                <a:ea typeface="Amiri" pitchFamily="2" charset="-78"/>
                 <a:cs typeface="Amiri" pitchFamily="2" charset="-78"/>
               </a:rPr>
               <a:t>تَتَّخِذُ</a:t>
@@ -49326,6 +49541,7 @@
                   <a:srgbClr val="1B3B6F"/>
                 </a:solidFill>
                 <a:latin typeface="Amiri" pitchFamily="2" charset="-78"/>
+                <a:ea typeface="Amiri" pitchFamily="2" charset="-78"/>
                 <a:cs typeface="Amiri" pitchFamily="2" charset="-78"/>
               </a:rPr>
               <a:t>يَتَطَلَّبُ الأَمْرُ أَنْ</a:t>
@@ -49352,6 +49568,7 @@
                   <a:srgbClr val="1B3B6F"/>
                 </a:solidFill>
                 <a:latin typeface="Amiri" pitchFamily="2" charset="-78"/>
+                <a:ea typeface="Amiri" pitchFamily="2" charset="-78"/>
                 <a:cs typeface="Amiri" pitchFamily="2" charset="-78"/>
               </a:rPr>
               <a:t>الحُكُومَاتُ</a:t>
@@ -49493,6 +49710,7 @@
                   <a:srgbClr val="1F2A37"/>
                 </a:solidFill>
                 <a:latin typeface="Amiri" pitchFamily="2" charset="-78"/>
+                <a:ea typeface="Amiri" pitchFamily="2" charset="-78"/>
                 <a:cs typeface="Amiri" pitchFamily="2" charset="-78"/>
               </a:rPr>
               <a:t>تَتَحَرَّكَ</a:t>
@@ -49594,6 +49812,7 @@
                   <a:srgbClr val="9AA1AB"/>
                 </a:solidFill>
                 <a:latin typeface="Amiri" pitchFamily="2" charset="-78"/>
+                <a:ea typeface="Amiri" pitchFamily="2" charset="-78"/>
                 <a:cs typeface="Amiri" pitchFamily="2" charset="-78"/>
               </a:rPr>
               <a:t>تَتَحَرَّكُ</a:t>
@@ -49695,6 +49914,7 @@
                   <a:srgbClr val="9AA1AB"/>
                 </a:solidFill>
                 <a:latin typeface="Amiri" pitchFamily="2" charset="-78"/>
+                <a:ea typeface="Amiri" pitchFamily="2" charset="-78"/>
                 <a:cs typeface="Amiri" pitchFamily="2" charset="-78"/>
               </a:rPr>
               <a:t>تَحَرَّكَتْ</a:t>
@@ -49884,6 +50104,7 @@
                   <a:srgbClr val="1B3B6F"/>
                 </a:solidFill>
                 <a:latin typeface="Amiri" pitchFamily="2" charset="-78"/>
+                <a:ea typeface="Amiri" pitchFamily="2" charset="-78"/>
                 <a:cs typeface="Amiri" pitchFamily="2" charset="-78"/>
               </a:rPr>
               <a:t>المَعْنَى العَامُّ ← التَّفَاصِيلُ ← الرَّأْيُ وَالأُسْلُوبُ ← الدِّقَّةُ</a:t>
@@ -50017,6 +50238,7 @@
                   <a:srgbClr val="D4AF37"/>
                 </a:solidFill>
                 <a:latin typeface="Amiri" pitchFamily="2" charset="-78"/>
+                <a:ea typeface="Amiri" pitchFamily="2" charset="-78"/>
                 <a:cs typeface="Amiri" pitchFamily="2" charset="-78"/>
               </a:rPr>
               <a:t>م</a:t>
@@ -50337,6 +50559,7 @@
                   <a:srgbClr val="8A6D1E"/>
                 </a:solidFill>
                 <a:latin typeface="Amiri" pitchFamily="2" charset="-78"/>
+                <a:ea typeface="Amiri" pitchFamily="2" charset="-78"/>
                 <a:cs typeface="Amiri" pitchFamily="2" charset="-78"/>
               </a:rPr>
               <a:t>الأَهْدَافُ وَمَعَايِيرُ النَّجَاحِ</a:t>
@@ -50485,6 +50708,7 @@
                   <a:srgbClr val="8A6D1E"/>
                 </a:solidFill>
                 <a:latin typeface="Amiri" pitchFamily="2" charset="-78"/>
+                <a:ea typeface="Amiri" pitchFamily="2" charset="-78"/>
                 <a:cs typeface="Amiri" pitchFamily="2" charset="-78"/>
               </a:rPr>
               <a:t>سَتَتَعَلَّمُ اليَوْمَ</a:t>
@@ -51743,6 +51967,7 @@
                   <a:srgbClr val="D4AF37"/>
                 </a:solidFill>
                 <a:latin typeface="Amiri" pitchFamily="2" charset="-78"/>
+                <a:ea typeface="Amiri" pitchFamily="2" charset="-78"/>
                 <a:cs typeface="Amiri" pitchFamily="2" charset="-78"/>
               </a:rPr>
               <a:t>كَلِمَاتُ الدَّرْسِ</a:t>
@@ -51965,6 +52190,7 @@
                   <a:srgbClr val="1B3B6F"/>
                 </a:solidFill>
                 <a:latin typeface="Amiri" pitchFamily="2" charset="-78"/>
+                <a:ea typeface="Amiri" pitchFamily="2" charset="-78"/>
                 <a:cs typeface="Amiri" pitchFamily="2" charset="-78"/>
               </a:rPr>
               <a:t>مَعْنًى</a:t>
@@ -51998,11 +52224,12 @@
               <a:buNone/>
             </a:pPr>
             <a:r>
-              <a:rPr lang="ur-PK" altLang="en-US" sz="1400" b="1" dirty="0">
+              <a:rPr lang="ar-SA" altLang="en-US" sz="1400" b="1" dirty="0">
                 <a:solidFill>
                   <a:srgbClr val="2E8B57"/>
                 </a:solidFill>
                 <a:latin typeface="Amiri" pitchFamily="2" charset="-78"/>
+                <a:ea typeface="Amiri" pitchFamily="2" charset="-78"/>
                 <a:cs typeface="Amiri" pitchFamily="2" charset="-78"/>
               </a:rPr>
               <a:t>‎معنی‎ </a:t>
@@ -52054,6 +52281,7 @@
                   <a:srgbClr val="1B3B6F"/>
                 </a:solidFill>
                 <a:latin typeface="Amiri" pitchFamily="2" charset="-78"/>
+                <a:ea typeface="Amiri" pitchFamily="2" charset="-78"/>
                 <a:cs typeface="Amiri" pitchFamily="2" charset="-78"/>
               </a:rPr>
               <a:t>دَلِيلٌ</a:t>
@@ -52087,11 +52315,12 @@
               <a:buNone/>
             </a:pPr>
             <a:r>
-              <a:rPr lang="ur-PK" altLang="en-US" sz="1400" b="1" dirty="0">
+              <a:rPr lang="ar-SA" altLang="en-US" sz="1400" b="1" dirty="0">
                 <a:solidFill>
                   <a:srgbClr val="2E8B57"/>
                 </a:solidFill>
                 <a:latin typeface="Amiri" pitchFamily="2" charset="-78"/>
+                <a:ea typeface="Amiri" pitchFamily="2" charset="-78"/>
                 <a:cs typeface="Amiri" pitchFamily="2" charset="-78"/>
               </a:rPr>
               <a:t>‎دلیل‎ </a:t>
@@ -52143,6 +52372,7 @@
                   <a:srgbClr val="1B3B6F"/>
                 </a:solidFill>
                 <a:latin typeface="Amiri" pitchFamily="2" charset="-78"/>
+                <a:ea typeface="Amiri" pitchFamily="2" charset="-78"/>
                 <a:cs typeface="Amiri" pitchFamily="2" charset="-78"/>
               </a:rPr>
               <a:t>اسْتِنْتَاجٌ</a:t>
@@ -52176,11 +52406,12 @@
               <a:buNone/>
             </a:pPr>
             <a:r>
-              <a:rPr lang="ur-PK" altLang="en-US" sz="1400" b="1" dirty="0">
+              <a:rPr lang="ar-SA" altLang="en-US" sz="1400" b="1" dirty="0">
                 <a:solidFill>
                   <a:srgbClr val="2E8B57"/>
                 </a:solidFill>
                 <a:latin typeface="Amiri" pitchFamily="2" charset="-78"/>
+                <a:ea typeface="Amiri" pitchFamily="2" charset="-78"/>
                 <a:cs typeface="Amiri" pitchFamily="2" charset="-78"/>
               </a:rPr>
               <a:t>‎استنتاج‎ </a:t>
@@ -52232,6 +52463,7 @@
                   <a:srgbClr val="1B3B6F"/>
                 </a:solidFill>
                 <a:latin typeface="Amiri" pitchFamily="2" charset="-78"/>
+                <a:ea typeface="Amiri" pitchFamily="2" charset="-78"/>
                 <a:cs typeface="Amiri" pitchFamily="2" charset="-78"/>
               </a:rPr>
               <a:t>مَجْهُولٌ</a:t>
@@ -52265,11 +52497,12 @@
               <a:buNone/>
             </a:pPr>
             <a:r>
-              <a:rPr lang="ur-PK" altLang="en-US" sz="1400" b="1" dirty="0">
+              <a:rPr lang="ar-SA" altLang="en-US" sz="1400" b="1" dirty="0">
                 <a:solidFill>
                   <a:srgbClr val="2E8B57"/>
                 </a:solidFill>
                 <a:latin typeface="Amiri" pitchFamily="2" charset="-78"/>
+                <a:ea typeface="Amiri" pitchFamily="2" charset="-78"/>
                 <a:cs typeface="Amiri" pitchFamily="2" charset="-78"/>
               </a:rPr>
               <a:t>‎مجہول‎ </a:t>
@@ -52321,6 +52554,7 @@
                   <a:srgbClr val="1B3B6F"/>
                 </a:solidFill>
                 <a:latin typeface="Amiri" pitchFamily="2" charset="-78"/>
+                <a:ea typeface="Amiri" pitchFamily="2" charset="-78"/>
                 <a:cs typeface="Amiri" pitchFamily="2" charset="-78"/>
               </a:rPr>
               <a:t>دِقَّةٌ</a:t>
@@ -52354,11 +52588,12 @@
               <a:buNone/>
             </a:pPr>
             <a:r>
-              <a:rPr lang="ur-PK" altLang="en-US" sz="1400" b="1" dirty="0">
+              <a:rPr lang="ar-SA" altLang="en-US" sz="1400" b="1" dirty="0">
                 <a:solidFill>
                   <a:srgbClr val="2E8B57"/>
                 </a:solidFill>
                 <a:latin typeface="Amiri" pitchFamily="2" charset="-78"/>
+                <a:ea typeface="Amiri" pitchFamily="2" charset="-78"/>
                 <a:cs typeface="Amiri" pitchFamily="2" charset="-78"/>
               </a:rPr>
               <a:t>‎دقت‎ </a:t>
@@ -52505,6 +52740,7 @@
                   <a:srgbClr val="D4AF37"/>
                 </a:solidFill>
                 <a:latin typeface="Amiri" pitchFamily="2" charset="-78"/>
+                <a:ea typeface="Amiri" pitchFamily="2" charset="-78"/>
                 <a:cs typeface="Amiri" pitchFamily="2" charset="-78"/>
               </a:rPr>
               <a:t>م</a:t>
@@ -52825,6 +53061,7 @@
                   <a:srgbClr val="8A6D1E"/>
                 </a:solidFill>
                 <a:latin typeface="Amiri" pitchFamily="2" charset="-78"/>
+                <a:ea typeface="Amiri" pitchFamily="2" charset="-78"/>
                 <a:cs typeface="Amiri" pitchFamily="2" charset="-78"/>
               </a:rPr>
               <a:t>كَلِمَاتُ الدَّرْسِ</a:t>
@@ -53063,6 +53300,7 @@
                   <a:srgbClr val="1B3B6F"/>
                 </a:solidFill>
                 <a:latin typeface="Amiri" pitchFamily="2" charset="-78"/>
+                <a:ea typeface="Amiri" pitchFamily="2" charset="-78"/>
                 <a:cs typeface="Amiri" pitchFamily="2" charset="-78"/>
               </a:rPr>
               <a:t>المَعْنَى العَامُّ</a:t>
@@ -53382,6 +53620,7 @@
                   <a:srgbClr val="1B3B6F"/>
                 </a:solidFill>
                 <a:latin typeface="Amiri" pitchFamily="2" charset="-78"/>
+                <a:ea typeface="Amiri" pitchFamily="2" charset="-78"/>
                 <a:cs typeface="Amiri" pitchFamily="2" charset="-78"/>
               </a:rPr>
               <a:t>التَّفَاصِيلُ الوَاقِعِيَّةُ</a:t>
@@ -53539,6 +53778,7 @@
                   <a:srgbClr val="1B3B6F"/>
                 </a:solidFill>
                 <a:latin typeface="Amiri" pitchFamily="2" charset="-78"/>
+                <a:ea typeface="Amiri" pitchFamily="2" charset="-78"/>
                 <a:cs typeface="Amiri" pitchFamily="2" charset="-78"/>
               </a:rPr>
               <a:t>تَفْصِيلٌ</a:t>
@@ -53739,6 +53979,7 @@
                   <a:srgbClr val="1B3B6F"/>
                 </a:solidFill>
                 <a:latin typeface="Amiri" pitchFamily="2" charset="-78"/>
+                <a:ea typeface="Amiri" pitchFamily="2" charset="-78"/>
                 <a:cs typeface="Amiri" pitchFamily="2" charset="-78"/>
               </a:rPr>
               <a:t>الرَّأْيُ وَالمَوْقِفُ وَالأُسْلُوبُ</a:t>
@@ -53928,6 +54169,7 @@
                   <a:srgbClr val="1B3B6F"/>
                 </a:solidFill>
                 <a:latin typeface="Amiri" pitchFamily="2" charset="-78"/>
+                <a:ea typeface="Amiri" pitchFamily="2" charset="-78"/>
                 <a:cs typeface="Amiri" pitchFamily="2" charset="-78"/>
               </a:rPr>
               <a:t>الاخْتِيَارُ وَتَحْدِيدُ المَعْلُومَاتِ</a:t>
@@ -54115,6 +54357,7 @@
                   <a:srgbClr val="D4AF37"/>
                 </a:solidFill>
                 <a:latin typeface="Amiri" pitchFamily="2" charset="-78"/>
+                <a:ea typeface="Amiri" pitchFamily="2" charset="-78"/>
                 <a:cs typeface="Amiri" pitchFamily="2" charset="-78"/>
               </a:rPr>
               <a:t>م</a:t>
@@ -54435,6 +54678,7 @@
                   <a:srgbClr val="8A6D1E"/>
                 </a:solidFill>
                 <a:latin typeface="Amiri" pitchFamily="2" charset="-78"/>
+                <a:ea typeface="Amiri" pitchFamily="2" charset="-78"/>
                 <a:cs typeface="Amiri" pitchFamily="2" charset="-78"/>
               </a:rPr>
               <a:t>كَلِمَاتُ الدَّرْسِ</a:t>
@@ -54738,6 +54982,7 @@
                   <a:srgbClr val="1B3B6F"/>
                 </a:solidFill>
                 <a:latin typeface="Amiri" pitchFamily="2" charset="-78"/>
+                <a:ea typeface="Amiri" pitchFamily="2" charset="-78"/>
                 <a:cs typeface="Amiri" pitchFamily="2" charset="-78"/>
               </a:rPr>
               <a:t>الأَدِلَّةُ النَّصِّيَّةُ</a:t>
@@ -54895,6 +55140,7 @@
                   <a:srgbClr val="1B3B6F"/>
                 </a:solidFill>
                 <a:latin typeface="Amiri" pitchFamily="2" charset="-78"/>
+                <a:ea typeface="Amiri" pitchFamily="2" charset="-78"/>
                 <a:cs typeface="Amiri" pitchFamily="2" charset="-78"/>
               </a:rPr>
               <a:t>دَلِيلٌ نَصِّيٌّ</a:t>
@@ -55030,6 +55276,7 @@
                   <a:srgbClr val="1B3B6F"/>
                 </a:solidFill>
                 <a:latin typeface="Amiri" pitchFamily="2" charset="-78"/>
+                <a:ea typeface="Amiri" pitchFamily="2" charset="-78"/>
                 <a:cs typeface="Amiri" pitchFamily="2" charset="-78"/>
               </a:rPr>
               <a:t>اسْتِنْتَاجُ الكَلِمَاتِ المَجْهُولَةِ</a:t>
@@ -55284,6 +55531,7 @@
                   <a:srgbClr val="1B3B6F"/>
                 </a:solidFill>
                 <a:latin typeface="Amiri" pitchFamily="2" charset="-78"/>
+                <a:ea typeface="Amiri" pitchFamily="2" charset="-78"/>
                 <a:cs typeface="Amiri" pitchFamily="2" charset="-78"/>
               </a:rPr>
               <a:t>التَّطَابُقُ عَبْرَ النُّصُوصِ</a:t>
@@ -55473,6 +55721,7 @@
                   <a:srgbClr val="1B3B6F"/>
                 </a:solidFill>
                 <a:latin typeface="Amiri" pitchFamily="2" charset="-78"/>
+                <a:ea typeface="Amiri" pitchFamily="2" charset="-78"/>
                 <a:cs typeface="Amiri" pitchFamily="2" charset="-78"/>
               </a:rPr>
               <a:t>الدِّقَّةُ فِي الاخْتِيَارِ</a:t>
@@ -55625,13 +55874,9 @@
     <a:fontScheme name="Office">
       <a:majorFont>
         <a:latin typeface="Calibri Light" panose="020F0302020204030204"/>
-        <a:ea typeface=""/>
-        <a:cs typeface=""/>
-        <a:font script="Jpan" typeface="游ゴシック Light"/>
-        <a:font script="Hang" typeface="맑은 고딕"/>
-        <a:font script="Hans" typeface="等线 Light"/>
-        <a:font script="Hant" typeface="新細明體"/>
-        <a:font script="Arab" typeface="Times New Roman"/>
+        <a:ea typeface="Amiri" pitchFamily="2" charset="-78"/>
+        <a:cs typeface="Amiri" pitchFamily="2" charset="-78"/>
+        <a:font script="Arab" typeface="Amiri"/>
         <a:font script="Hebr" typeface="Times New Roman"/>
         <a:font script="Thai" typeface="Angsana New"/>
         <a:font script="Ethi" typeface="Nyala"/>
@@ -55677,13 +55922,9 @@
       </a:majorFont>
       <a:minorFont>
         <a:latin typeface="Calibri" panose="020F0502020204030204"/>
-        <a:ea typeface=""/>
-        <a:cs typeface=""/>
-        <a:font script="Jpan" typeface="游ゴシック"/>
-        <a:font script="Hang" typeface="맑은 고딕"/>
-        <a:font script="Hans" typeface="等线"/>
-        <a:font script="Hant" typeface="新細明體"/>
-        <a:font script="Arab" typeface="Arial"/>
+        <a:ea typeface="Amiri" pitchFamily="2" charset="-78"/>
+        <a:cs typeface="Amiri" pitchFamily="2" charset="-78"/>
+        <a:font script="Arab" typeface="Amiri"/>
         <a:font script="Hebr" typeface="Arial"/>
         <a:font script="Thai" typeface="Cordia New"/>
         <a:font script="Ethi" typeface="Nyala"/>

--- a/Progression_P6/P6-L03_Paper_2_Reading.pptx
+++ b/Progression_P6/P6-L03_Paper_2_Reading.pptx
@@ -40005,7 +40005,7 @@
                 <a:solidFill>
                   <a:srgbClr val="5A6472"/>
                 </a:solidFill>
-                <a:latin typeface="Calibri" pitchFamily="34" charset="0"/>
+                <a:latin typeface="Amiri" pitchFamily="2" charset="-78"/>
                 <a:ea typeface="Amiri" pitchFamily="2" charset="-78"/>
                 <a:cs typeface="Amiri" pitchFamily="2" charset="-78"/>
               </a:rPr>
